--- a/docs/주간보고/AI활용_개발공정_지침서_보고용 복사본.pptx
+++ b/docs/주간보고/AI활용_개발공정_지침서_보고용 복사본.pptx
@@ -3685,7 +3685,7 @@
           <p:nvPr>
             <p:extLst>
               <p:ext uri="{D42A27DB-BD31-4B8C-83A1-F6EECF244321}">
-                <p14:modId xmlns:p14="http://schemas.microsoft.com/office/powerpoint/2010/main" val="2037080990"/>
+                <p14:modId xmlns:p14="http://schemas.microsoft.com/office/powerpoint/2010/main" val="3991290460"/>
               </p:ext>
             </p:extLst>
           </p:nvPr>
@@ -3701,14 +3701,14 @@
                 <a:tableStyleId>{5C22544A-7EE6-4342-B048-85BDC9FD1C3A}</a:tableStyleId>
               </a:tblPr>
               <a:tblGrid>
-                <a:gridCol w="3657600">
+                <a:gridCol w="3522855">
                   <a:extLst>
                     <a:ext uri="{9D8B030D-6E8A-4147-A177-3AD203B41FA5}">
                       <a16:colId xmlns:a16="http://schemas.microsoft.com/office/drawing/2014/main" val="20000"/>
                     </a:ext>
                   </a:extLst>
                 </a:gridCol>
-                <a:gridCol w="7616952">
+                <a:gridCol w="7751697">
                   <a:extLst>
                     <a:ext uri="{9D8B030D-6E8A-4147-A177-3AD203B41FA5}">
                       <a16:colId xmlns:a16="http://schemas.microsoft.com/office/drawing/2014/main" val="20001"/>
@@ -3722,7 +3722,7 @@
                     <a:bodyPr/>
                     <a:lstStyle/>
                     <a:p>
-                      <a:pPr algn="l"/>
+                      <a:pPr algn="ctr"/>
                       <a:r>
                         <a:rPr sz="1300" b="1" i="0" spc="300" baseline="0" dirty="0" err="1">
                           <a:solidFill>
@@ -3753,7 +3753,7 @@
                     <a:bodyPr/>
                     <a:lstStyle/>
                     <a:p>
-                      <a:pPr algn="l"/>
+                      <a:pPr algn="ctr"/>
                       <a:r>
                         <a:rPr sz="1300" b="1" i="0" spc="300" baseline="0" dirty="0" err="1">
                           <a:solidFill>
@@ -3791,7 +3791,7 @@
                     <a:bodyPr/>
                     <a:lstStyle/>
                     <a:p>
-                      <a:pPr algn="l"/>
+                      <a:pPr algn="ctr"/>
                       <a:r>
                         <a:rPr sz="1300" b="1" i="0" spc="120" baseline="0" dirty="0" err="1">
                           <a:solidFill>
@@ -3922,7 +3922,7 @@
                     <a:bodyPr/>
                     <a:lstStyle/>
                     <a:p>
-                      <a:pPr algn="l"/>
+                      <a:pPr algn="ctr"/>
                       <a:r>
                         <a:rPr sz="1300" b="0" i="0" spc="120" baseline="0" dirty="0" err="1">
                           <a:solidFill>
@@ -4040,7 +4040,7 @@
                     <a:bodyPr/>
                     <a:lstStyle/>
                     <a:p>
-                      <a:pPr algn="l"/>
+                      <a:pPr algn="ctr"/>
                       <a:r>
                         <a:rPr sz="1300" b="1" i="0" spc="120" baseline="0" dirty="0" err="1">
                           <a:solidFill>
@@ -4131,7 +4131,7 @@
                     <a:bodyPr/>
                     <a:lstStyle/>
                     <a:p>
-                      <a:pPr algn="l"/>
+                      <a:pPr algn="ctr"/>
                       <a:r>
                         <a:rPr sz="1300" b="0" i="0" spc="120" baseline="0" dirty="0">
                           <a:solidFill>
@@ -4279,7 +4279,7 @@
                     <a:bodyPr/>
                     <a:lstStyle/>
                     <a:p>
-                      <a:pPr algn="l"/>
+                      <a:pPr algn="ctr"/>
                       <a:r>
                         <a:rPr sz="1300" b="1" i="0" spc="120" baseline="0" dirty="0">
                           <a:solidFill>
@@ -4360,7 +4360,7 @@
                     <a:bodyPr/>
                     <a:lstStyle/>
                     <a:p>
-                      <a:pPr algn="l"/>
+                      <a:pPr algn="ctr"/>
                       <a:r>
                         <a:rPr sz="1300" b="0" i="0" spc="120" baseline="0" dirty="0">
                           <a:solidFill>
@@ -4568,7 +4568,7 @@
                     <a:bodyPr/>
                     <a:lstStyle/>
                     <a:p>
-                      <a:pPr algn="l"/>
+                      <a:pPr algn="ctr"/>
                       <a:r>
                         <a:rPr sz="1300" b="1" i="0" spc="120" baseline="0" dirty="0" err="1">
                           <a:solidFill>
@@ -4679,7 +4679,7 @@
                     <a:bodyPr/>
                     <a:lstStyle/>
                     <a:p>
-                      <a:pPr algn="l"/>
+                      <a:pPr algn="ctr"/>
                       <a:r>
                         <a:rPr sz="1300" b="0" i="0" spc="120" baseline="0" dirty="0" err="1">
                           <a:solidFill>
@@ -5368,7 +5368,7 @@
           <p:nvPr>
             <p:extLst>
               <p:ext uri="{D42A27DB-BD31-4B8C-83A1-F6EECF244321}">
-                <p14:modId xmlns:p14="http://schemas.microsoft.com/office/powerpoint/2010/main" val="273207438"/>
+                <p14:modId xmlns:p14="http://schemas.microsoft.com/office/powerpoint/2010/main" val="3488211154"/>
               </p:ext>
             </p:extLst>
           </p:nvPr>
@@ -5384,14 +5384,14 @@
                 <a:tableStyleId>{5C22544A-7EE6-4342-B048-85BDC9FD1C3A}</a:tableStyleId>
               </a:tblPr>
               <a:tblGrid>
-                <a:gridCol w="4901979">
+                <a:gridCol w="4285716">
                   <a:extLst>
                     <a:ext uri="{9D8B030D-6E8A-4147-A177-3AD203B41FA5}">
                       <a16:colId xmlns:a16="http://schemas.microsoft.com/office/drawing/2014/main" val="20000"/>
                     </a:ext>
                   </a:extLst>
                 </a:gridCol>
-                <a:gridCol w="6372572">
+                <a:gridCol w="6988835">
                   <a:extLst>
                     <a:ext uri="{9D8B030D-6E8A-4147-A177-3AD203B41FA5}">
                       <a16:colId xmlns:a16="http://schemas.microsoft.com/office/drawing/2014/main" val="20001"/>
@@ -5405,7 +5405,7 @@
                     <a:bodyPr/>
                     <a:lstStyle/>
                     <a:p>
-                      <a:pPr algn="l"/>
+                      <a:pPr algn="ctr"/>
                       <a:r>
                         <a:rPr sz="1300" b="1" i="0" spc="300" baseline="0" dirty="0" err="1">
                           <a:solidFill>
@@ -5436,7 +5436,7 @@
                     <a:bodyPr/>
                     <a:lstStyle/>
                     <a:p>
-                      <a:pPr algn="l"/>
+                      <a:pPr algn="ctr"/>
                       <a:r>
                         <a:rPr sz="1300" b="1" i="0" spc="300" baseline="0" dirty="0">
                           <a:solidFill>
@@ -5504,7 +5504,7 @@
                     <a:bodyPr/>
                     <a:lstStyle/>
                     <a:p>
-                      <a:pPr algn="l"/>
+                      <a:pPr algn="ctr"/>
                       <a:r>
                         <a:rPr sz="1300" b="1" i="0" spc="120" baseline="0" dirty="0" err="1">
                           <a:solidFill>
@@ -5615,7 +5615,7 @@
                     <a:bodyPr/>
                     <a:lstStyle/>
                     <a:p>
-                      <a:pPr algn="l"/>
+                      <a:pPr algn="ctr"/>
                       <a:r>
                         <a:rPr sz="1300" b="0" i="0" spc="120" baseline="0" dirty="0" err="1">
                           <a:solidFill>
@@ -5733,7 +5733,7 @@
                     <a:bodyPr/>
                     <a:lstStyle/>
                     <a:p>
-                      <a:pPr algn="l"/>
+                      <a:pPr algn="ctr"/>
                       <a:r>
                         <a:rPr sz="1300" b="1" i="0" spc="120" baseline="0" dirty="0" err="1">
                           <a:solidFill>
@@ -5824,7 +5824,7 @@
                     <a:bodyPr/>
                     <a:lstStyle/>
                     <a:p>
-                      <a:pPr algn="l"/>
+                      <a:pPr algn="ctr"/>
                       <a:r>
                         <a:rPr sz="1300" b="0" i="0" spc="120" baseline="0" dirty="0" err="1">
                           <a:solidFill>
@@ -5942,7 +5942,7 @@
                     <a:bodyPr/>
                     <a:lstStyle/>
                     <a:p>
-                      <a:pPr algn="l"/>
+                      <a:pPr algn="ctr"/>
                       <a:r>
                         <a:rPr sz="1300" b="1" i="0" spc="120" baseline="0">
                           <a:solidFill>
@@ -5966,7 +5966,7 @@
                     <a:bodyPr/>
                     <a:lstStyle/>
                     <a:p>
-                      <a:pPr algn="l"/>
+                      <a:pPr algn="ctr"/>
                       <a:r>
                         <a:rPr sz="1300" b="0" i="0" spc="120" baseline="0" dirty="0" err="1">
                           <a:solidFill>
@@ -7386,7 +7386,7 @@
           <p:nvPr>
             <p:extLst>
               <p:ext uri="{D42A27DB-BD31-4B8C-83A1-F6EECF244321}">
-                <p14:modId xmlns:p14="http://schemas.microsoft.com/office/powerpoint/2010/main" val="233632462"/>
+                <p14:modId xmlns:p14="http://schemas.microsoft.com/office/powerpoint/2010/main" val="1270490399"/>
               </p:ext>
             </p:extLst>
           </p:nvPr>
@@ -7402,14 +7402,14 @@
                 <a:tableStyleId>{5C22544A-7EE6-4342-B048-85BDC9FD1C3A}</a:tableStyleId>
               </a:tblPr>
               <a:tblGrid>
-                <a:gridCol w="2254910">
+                <a:gridCol w="1713432">
                   <a:extLst>
                     <a:ext uri="{9D8B030D-6E8A-4147-A177-3AD203B41FA5}">
                       <a16:colId xmlns:a16="http://schemas.microsoft.com/office/drawing/2014/main" val="20000"/>
                     </a:ext>
                   </a:extLst>
                 </a:gridCol>
-                <a:gridCol w="3607856">
+                <a:gridCol w="4149334">
                   <a:extLst>
                     <a:ext uri="{9D8B030D-6E8A-4147-A177-3AD203B41FA5}">
                       <a16:colId xmlns:a16="http://schemas.microsoft.com/office/drawing/2014/main" val="20001"/>
@@ -7430,7 +7430,7 @@
                     <a:bodyPr/>
                     <a:lstStyle/>
                     <a:p>
-                      <a:pPr algn="l"/>
+                      <a:pPr algn="ctr"/>
                       <a:r>
                         <a:rPr sz="1300" b="1" i="0" spc="300" baseline="0" dirty="0" err="1">
                           <a:solidFill>
@@ -7461,7 +7461,7 @@
                     <a:bodyPr/>
                     <a:lstStyle/>
                     <a:p>
-                      <a:pPr algn="l"/>
+                      <a:pPr algn="ctr"/>
                       <a:r>
                         <a:rPr sz="1300" b="1" i="0" spc="300" baseline="0">
                           <a:solidFill>
@@ -7485,7 +7485,7 @@
                     <a:bodyPr/>
                     <a:lstStyle/>
                     <a:p>
-                      <a:pPr algn="l"/>
+                      <a:pPr algn="ctr"/>
                       <a:r>
                         <a:rPr sz="1300" b="1" i="0" spc="300" baseline="0" dirty="0" err="1">
                           <a:solidFill>
@@ -7543,7 +7543,7 @@
                     <a:bodyPr/>
                     <a:lstStyle/>
                     <a:p>
-                      <a:pPr algn="l"/>
+                      <a:pPr algn="ctr"/>
                       <a:r>
                         <a:rPr sz="1300" b="1" i="0" spc="120" baseline="0" dirty="0" err="1">
                           <a:solidFill>
@@ -7574,7 +7574,7 @@
                     <a:bodyPr/>
                     <a:lstStyle/>
                     <a:p>
-                      <a:pPr algn="l"/>
+                      <a:pPr algn="ctr"/>
                       <a:r>
                         <a:rPr sz="1300" b="0" i="0" spc="120" baseline="0" dirty="0" err="1">
                           <a:solidFill>
@@ -7645,7 +7645,7 @@
                     <a:bodyPr/>
                     <a:lstStyle/>
                     <a:p>
-                      <a:pPr algn="l"/>
+                      <a:pPr algn="ctr"/>
                       <a:r>
                         <a:rPr sz="1300" b="0" i="0" spc="120" baseline="0">
                           <a:solidFill>
@@ -7676,7 +7676,7 @@
                     <a:bodyPr/>
                     <a:lstStyle/>
                     <a:p>
-                      <a:pPr algn="l"/>
+                      <a:pPr algn="ctr"/>
                       <a:r>
                         <a:rPr sz="1300" b="1" i="0" spc="120" baseline="0" dirty="0" err="1">
                           <a:solidFill>
@@ -7707,7 +7707,7 @@
                     <a:bodyPr/>
                     <a:lstStyle/>
                     <a:p>
-                      <a:pPr algn="l"/>
+                      <a:pPr algn="ctr"/>
                       <a:r>
                         <a:rPr sz="1300" b="0" i="0" spc="120" baseline="0" dirty="0" err="1">
                           <a:solidFill>
@@ -7778,7 +7778,7 @@
                     <a:bodyPr/>
                     <a:lstStyle/>
                     <a:p>
-                      <a:pPr algn="l"/>
+                      <a:pPr algn="ctr"/>
                       <a:r>
                         <a:rPr sz="1300" b="0" i="0" spc="120" baseline="0">
                           <a:solidFill>
@@ -7809,7 +7809,7 @@
                     <a:bodyPr/>
                     <a:lstStyle/>
                     <a:p>
-                      <a:pPr algn="l"/>
+                      <a:pPr algn="ctr"/>
                       <a:r>
                         <a:rPr sz="1300" b="1" i="0" spc="120" baseline="0">
                           <a:solidFill>
@@ -7833,7 +7833,7 @@
                     <a:bodyPr/>
                     <a:lstStyle/>
                     <a:p>
-                      <a:pPr algn="l"/>
+                      <a:pPr algn="ctr"/>
                       <a:r>
                         <a:rPr sz="1300" b="0" i="0" spc="120" baseline="0" dirty="0" err="1">
                           <a:solidFill>
@@ -7904,7 +7904,7 @@
                     <a:bodyPr/>
                     <a:lstStyle/>
                     <a:p>
-                      <a:pPr algn="l"/>
+                      <a:pPr algn="ctr"/>
                       <a:r>
                         <a:rPr sz="1300" b="0" i="0" spc="120" baseline="0" dirty="0">
                           <a:solidFill>
@@ -7955,7 +7955,7 @@
                     <a:bodyPr/>
                     <a:lstStyle/>
                     <a:p>
-                      <a:pPr algn="l"/>
+                      <a:pPr algn="ctr"/>
                       <a:r>
                         <a:rPr sz="1300" b="1" i="0" spc="120" baseline="0" dirty="0" err="1">
                           <a:solidFill>
@@ -7986,7 +7986,7 @@
                     <a:bodyPr/>
                     <a:lstStyle/>
                     <a:p>
-                      <a:pPr algn="l"/>
+                      <a:pPr algn="ctr"/>
                       <a:r>
                         <a:rPr sz="1300" b="0" i="0" spc="120" baseline="0" dirty="0" err="1">
                           <a:solidFill>
@@ -8057,7 +8057,7 @@
                     <a:bodyPr/>
                     <a:lstStyle/>
                     <a:p>
-                      <a:pPr algn="l"/>
+                      <a:pPr algn="ctr"/>
                       <a:r>
                         <a:rPr sz="1300" b="0" i="0" spc="120" baseline="0" dirty="0">
                           <a:solidFill>
@@ -8145,7 +8145,7 @@
                     <a:bodyPr/>
                     <a:lstStyle/>
                     <a:p>
-                      <a:pPr algn="l"/>
+                      <a:pPr algn="ctr"/>
                       <a:r>
                         <a:rPr sz="1300" b="1" i="0" spc="120" baseline="0" dirty="0" err="1">
                           <a:solidFill>
@@ -8176,7 +8176,7 @@
                     <a:bodyPr/>
                     <a:lstStyle/>
                     <a:p>
-                      <a:pPr algn="l"/>
+                      <a:pPr algn="ctr"/>
                       <a:r>
                         <a:rPr sz="1300" b="0" i="0" spc="120" baseline="0" dirty="0" err="1">
                           <a:solidFill>
@@ -8227,7 +8227,7 @@
                     <a:bodyPr/>
                     <a:lstStyle/>
                     <a:p>
-                      <a:pPr algn="l"/>
+                      <a:pPr algn="ctr"/>
                       <a:r>
                         <a:rPr sz="1300" b="0" i="0" spc="120" baseline="0" dirty="0" err="1">
                           <a:solidFill>
@@ -8285,7 +8285,7 @@
                     <a:bodyPr/>
                     <a:lstStyle/>
                     <a:p>
-                      <a:pPr algn="l"/>
+                      <a:pPr algn="ctr"/>
                       <a:r>
                         <a:rPr sz="1300" b="1" i="0" spc="120" baseline="0">
                           <a:solidFill>
@@ -8309,7 +8309,7 @@
                     <a:bodyPr/>
                     <a:lstStyle/>
                     <a:p>
-                      <a:pPr algn="l"/>
+                      <a:pPr algn="ctr"/>
                       <a:r>
                         <a:rPr sz="1300" b="0" i="0" spc="120" baseline="0" dirty="0" err="1">
                           <a:solidFill>
@@ -8340,7 +8340,7 @@
                     <a:bodyPr/>
                     <a:lstStyle/>
                     <a:p>
-                      <a:pPr algn="l"/>
+                      <a:pPr algn="ctr"/>
                       <a:r>
                         <a:rPr sz="1300" b="0" i="0" spc="120" baseline="0" dirty="0" err="1">
                           <a:solidFill>
@@ -8381,7 +8381,7 @@
                     <a:bodyPr/>
                     <a:lstStyle/>
                     <a:p>
-                      <a:pPr algn="l"/>
+                      <a:pPr algn="ctr"/>
                       <a:r>
                         <a:rPr sz="1300" b="1" i="0" spc="120" baseline="0">
                           <a:solidFill>
@@ -8405,7 +8405,7 @@
                     <a:bodyPr/>
                     <a:lstStyle/>
                     <a:p>
-                      <a:pPr algn="l"/>
+                      <a:pPr algn="ctr"/>
                       <a:r>
                         <a:rPr sz="1300" b="0" i="0" spc="120" baseline="0" dirty="0" err="1">
                           <a:solidFill>
@@ -8456,7 +8456,7 @@
                     <a:bodyPr/>
                     <a:lstStyle/>
                     <a:p>
-                      <a:pPr algn="l"/>
+                      <a:pPr algn="ctr"/>
                       <a:r>
                         <a:rPr sz="1300" b="0" i="0" spc="120" baseline="0" dirty="0" err="1">
                           <a:solidFill>
@@ -8980,7 +8980,7 @@
           <p:nvPr>
             <p:extLst>
               <p:ext uri="{D42A27DB-BD31-4B8C-83A1-F6EECF244321}">
-                <p14:modId xmlns:p14="http://schemas.microsoft.com/office/powerpoint/2010/main" val="3696010952"/>
+                <p14:modId xmlns:p14="http://schemas.microsoft.com/office/powerpoint/2010/main" val="3581241343"/>
               </p:ext>
             </p:extLst>
           </p:nvPr>
@@ -9024,7 +9024,7 @@
                     <a:bodyPr/>
                     <a:lstStyle/>
                     <a:p>
-                      <a:pPr algn="l"/>
+                      <a:pPr algn="ctr"/>
                       <a:r>
                         <a:rPr lang="ko-KR" altLang="en-US" sz="1300" b="1" i="0" spc="300" baseline="0" dirty="0">
                           <a:solidFill>
@@ -9065,7 +9065,7 @@
                     <a:bodyPr/>
                     <a:lstStyle/>
                     <a:p>
-                      <a:pPr algn="l"/>
+                      <a:pPr algn="ctr"/>
                       <a:r>
                         <a:rPr sz="1300" b="1" i="0" spc="300" baseline="0" dirty="0">
                           <a:solidFill>
@@ -9126,7 +9126,7 @@
                     <a:bodyPr/>
                     <a:lstStyle/>
                     <a:p>
-                      <a:pPr algn="l"/>
+                      <a:pPr algn="ctr"/>
                       <a:r>
                         <a:rPr sz="1300" b="1" i="0" spc="300" baseline="0" dirty="0" err="1">
                           <a:solidFill>
@@ -9184,7 +9184,7 @@
                     <a:bodyPr/>
                     <a:lstStyle/>
                     <a:p>
-                      <a:pPr algn="l"/>
+                      <a:pPr algn="ctr"/>
                       <a:r>
                         <a:rPr sz="1300" b="1" i="0" spc="120" baseline="0" dirty="0">
                           <a:solidFill>
@@ -9208,7 +9208,7 @@
                     <a:bodyPr/>
                     <a:lstStyle/>
                     <a:p>
-                      <a:pPr algn="l"/>
+                      <a:pPr algn="ctr"/>
                       <a:r>
                         <a:rPr sz="1300" b="0" i="0" spc="120" baseline="0" dirty="0" err="1">
                           <a:solidFill>
@@ -9279,7 +9279,7 @@
                     <a:bodyPr/>
                     <a:lstStyle/>
                     <a:p>
-                      <a:pPr algn="l"/>
+                      <a:pPr algn="ctr"/>
                       <a:r>
                         <a:rPr sz="1300" b="0" i="0" spc="120" baseline="0">
                           <a:solidFill>
@@ -9310,7 +9310,7 @@
                     <a:bodyPr/>
                     <a:lstStyle/>
                     <a:p>
-                      <a:pPr algn="l"/>
+                      <a:pPr algn="ctr"/>
                       <a:r>
                         <a:rPr sz="1300" b="1" i="0" spc="120" baseline="0" dirty="0">
                           <a:solidFill>
@@ -9334,7 +9334,7 @@
                     <a:bodyPr/>
                     <a:lstStyle/>
                     <a:p>
-                      <a:pPr algn="l"/>
+                      <a:pPr algn="ctr"/>
                       <a:r>
                         <a:rPr sz="1300" b="0" i="0" spc="120" baseline="0" dirty="0" err="1">
                           <a:solidFill>
@@ -9425,7 +9425,7 @@
                     <a:bodyPr/>
                     <a:lstStyle/>
                     <a:p>
-                      <a:pPr algn="l"/>
+                      <a:pPr algn="ctr"/>
                       <a:r>
                         <a:rPr sz="1300" b="0" i="0" spc="120" baseline="0">
                           <a:solidFill>
@@ -9456,7 +9456,7 @@
                     <a:bodyPr/>
                     <a:lstStyle/>
                     <a:p>
-                      <a:pPr algn="l"/>
+                      <a:pPr algn="ctr"/>
                       <a:r>
                         <a:rPr sz="1300" b="1" i="0" spc="120" baseline="0">
                           <a:solidFill>
@@ -9480,7 +9480,7 @@
                     <a:bodyPr/>
                     <a:lstStyle/>
                     <a:p>
-                      <a:pPr algn="l"/>
+                      <a:pPr algn="ctr"/>
                       <a:r>
                         <a:rPr sz="1300" b="0" i="0" spc="120" baseline="0" dirty="0" err="1">
                           <a:solidFill>
@@ -9551,7 +9551,7 @@
                     <a:bodyPr/>
                     <a:lstStyle/>
                     <a:p>
-                      <a:pPr algn="l"/>
+                      <a:pPr algn="ctr"/>
                       <a:r>
                         <a:rPr sz="1300" b="0" i="0" spc="120" baseline="0" dirty="0" err="1">
                           <a:solidFill>
@@ -9629,7 +9629,7 @@
                     <a:bodyPr/>
                     <a:lstStyle/>
                     <a:p>
-                      <a:pPr algn="l"/>
+                      <a:pPr algn="ctr"/>
                       <a:r>
                         <a:rPr sz="1300" b="1" i="0" spc="120" baseline="0" dirty="0">
                           <a:solidFill>
@@ -9653,7 +9653,7 @@
                     <a:bodyPr/>
                     <a:lstStyle/>
                     <a:p>
-                      <a:pPr algn="l"/>
+                      <a:pPr algn="ctr"/>
                       <a:r>
                         <a:rPr sz="1300" b="0" i="0" spc="120" baseline="0" dirty="0" err="1">
                           <a:solidFill>
@@ -9744,7 +9744,7 @@
                     <a:bodyPr/>
                     <a:lstStyle/>
                     <a:p>
-                      <a:pPr algn="l"/>
+                      <a:pPr algn="ctr"/>
                       <a:r>
                         <a:rPr sz="1300" b="0" i="0" spc="120" baseline="0" dirty="0" err="1">
                           <a:solidFill>
@@ -9941,7 +9941,7 @@
           <p:nvPr>
             <p:extLst>
               <p:ext uri="{D42A27DB-BD31-4B8C-83A1-F6EECF244321}">
-                <p14:modId xmlns:p14="http://schemas.microsoft.com/office/powerpoint/2010/main" val="3633146377"/>
+                <p14:modId xmlns:p14="http://schemas.microsoft.com/office/powerpoint/2010/main" val="3245932900"/>
               </p:ext>
             </p:extLst>
           </p:nvPr>
@@ -9985,7 +9985,7 @@
                     <a:bodyPr/>
                     <a:lstStyle/>
                     <a:p>
-                      <a:pPr algn="l"/>
+                      <a:pPr algn="ctr"/>
                       <a:r>
                         <a:rPr lang="ko-KR" altLang="en-US" sz="1300" b="1" i="0" spc="300" baseline="0" dirty="0">
                           <a:solidFill>
@@ -10026,7 +10026,7 @@
                     <a:bodyPr/>
                     <a:lstStyle/>
                     <a:p>
-                      <a:pPr algn="l"/>
+                      <a:pPr algn="ctr"/>
                       <a:r>
                         <a:rPr sz="1300" b="1" i="0" spc="300" baseline="0" dirty="0" err="1">
                           <a:solidFill>
@@ -10057,7 +10057,7 @@
                     <a:bodyPr/>
                     <a:lstStyle/>
                     <a:p>
-                      <a:pPr algn="l"/>
+                      <a:pPr algn="ctr"/>
                       <a:r>
                         <a:rPr sz="1300" b="1" i="0" spc="300" baseline="0" dirty="0" err="1">
                           <a:solidFill>
@@ -10135,7 +10135,7 @@
                     <a:bodyPr/>
                     <a:lstStyle/>
                     <a:p>
-                      <a:pPr algn="l"/>
+                      <a:pPr algn="ctr"/>
                       <a:r>
                         <a:rPr sz="1300" b="1" i="0" spc="120" baseline="0" dirty="0">
                           <a:solidFill>
@@ -10159,7 +10159,7 @@
                     <a:bodyPr/>
                     <a:lstStyle/>
                     <a:p>
-                      <a:pPr algn="l"/>
+                      <a:pPr algn="ctr"/>
                       <a:r>
                         <a:rPr sz="1300" b="0" i="0" spc="120" baseline="0" dirty="0" err="1">
                           <a:solidFill>
@@ -10230,7 +10230,7 @@
                     <a:bodyPr/>
                     <a:lstStyle/>
                     <a:p>
-                      <a:pPr algn="l"/>
+                      <a:pPr algn="ctr"/>
                       <a:r>
                         <a:rPr sz="1300" b="0" i="0" spc="120" baseline="0">
                           <a:solidFill>
@@ -10261,9 +10261,9 @@
                     <a:bodyPr/>
                     <a:lstStyle/>
                     <a:p>
-                      <a:pPr algn="l"/>
-                      <a:r>
-                        <a:rPr sz="1300" b="1" i="0" spc="120" baseline="0">
+                      <a:pPr algn="ctr"/>
+                      <a:r>
+                        <a:rPr sz="1300" b="1" i="0" spc="120" baseline="0" dirty="0">
                           <a:solidFill>
                             <a:srgbClr val="1F3B57"/>
                           </a:solidFill>
@@ -10285,7 +10285,7 @@
                     <a:bodyPr/>
                     <a:lstStyle/>
                     <a:p>
-                      <a:pPr algn="l"/>
+                      <a:pPr algn="ctr"/>
                       <a:r>
                         <a:rPr sz="1300" b="0" i="0" spc="120" baseline="0" dirty="0" err="1">
                           <a:solidFill>
@@ -10356,7 +10356,7 @@
                     <a:bodyPr/>
                     <a:lstStyle/>
                     <a:p>
-                      <a:pPr algn="l"/>
+                      <a:pPr algn="ctr"/>
                       <a:r>
                         <a:rPr sz="1300" b="0" i="0" spc="120" baseline="0" dirty="0" err="1">
                           <a:solidFill>
@@ -10434,7 +10434,7 @@
                     <a:bodyPr/>
                     <a:lstStyle/>
                     <a:p>
-                      <a:pPr algn="l"/>
+                      <a:pPr algn="ctr"/>
                       <a:r>
                         <a:rPr sz="1300" b="1" i="0" spc="120" baseline="0" dirty="0">
                           <a:solidFill>
@@ -10458,7 +10458,7 @@
                     <a:bodyPr/>
                     <a:lstStyle/>
                     <a:p>
-                      <a:pPr algn="l"/>
+                      <a:pPr algn="ctr"/>
                       <a:r>
                         <a:rPr sz="1300" b="0" i="0" spc="120" baseline="0" dirty="0" err="1">
                           <a:solidFill>
@@ -10529,7 +10529,7 @@
                     <a:bodyPr/>
                     <a:lstStyle/>
                     <a:p>
-                      <a:pPr algn="l"/>
+                      <a:pPr algn="ctr"/>
                       <a:r>
                         <a:rPr sz="1300" b="0" i="0" spc="120" baseline="0" dirty="0" err="1">
                           <a:solidFill>
@@ -10981,7 +10981,7 @@
           <p:nvPr>
             <p:extLst>
               <p:ext uri="{D42A27DB-BD31-4B8C-83A1-F6EECF244321}">
-                <p14:modId xmlns:p14="http://schemas.microsoft.com/office/powerpoint/2010/main" val="1703887600"/>
+                <p14:modId xmlns:p14="http://schemas.microsoft.com/office/powerpoint/2010/main" val="3782748665"/>
               </p:ext>
             </p:extLst>
           </p:nvPr>
@@ -10997,14 +10997,14 @@
                 <a:tableStyleId>{5C22544A-7EE6-4342-B048-85BDC9FD1C3A}</a:tableStyleId>
               </a:tblPr>
               <a:tblGrid>
-                <a:gridCol w="2103120">
+                <a:gridCol w="1612676">
                   <a:extLst>
                     <a:ext uri="{9D8B030D-6E8A-4147-A177-3AD203B41FA5}">
                       <a16:colId xmlns:a16="http://schemas.microsoft.com/office/drawing/2014/main" val="20000"/>
                     </a:ext>
                   </a:extLst>
                 </a:gridCol>
-                <a:gridCol w="3108960">
+                <a:gridCol w="3599404">
                   <a:extLst>
                     <a:ext uri="{9D8B030D-6E8A-4147-A177-3AD203B41FA5}">
                       <a16:colId xmlns:a16="http://schemas.microsoft.com/office/drawing/2014/main" val="20001"/>
@@ -11032,17 +11032,7 @@
                     <a:bodyPr/>
                     <a:lstStyle/>
                     <a:p>
-                      <a:pPr algn="l"/>
-                      <a:r>
-                        <a:rPr sz="1200" b="1" i="0" spc="300" baseline="0" dirty="0" err="1">
-                          <a:solidFill>
-                            <a:srgbClr val="FFFFFF"/>
-                          </a:solidFill>
-                          <a:latin typeface="Paperlogy 4 Regular" pitchFamily="2" charset="-127"/>
-                          <a:ea typeface="Paperlogy 4 Regular" pitchFamily="2" charset="-127"/>
-                        </a:rPr>
-                        <a:t>항목</a:t>
-                      </a:r>
+                      <a:pPr algn="ctr"/>
                       <a:endParaRPr sz="1200" b="1" i="0" spc="300" baseline="0" dirty="0">
                         <a:solidFill>
                           <a:srgbClr val="FFFFFF"/>
@@ -11063,7 +11053,7 @@
                     <a:bodyPr/>
                     <a:lstStyle/>
                     <a:p>
-                      <a:pPr algn="l"/>
+                      <a:pPr algn="ctr"/>
                       <a:r>
                         <a:rPr sz="1200" b="1" i="0" spc="300" baseline="0" dirty="0" err="1">
                           <a:solidFill>
@@ -11114,7 +11104,7 @@
                     <a:bodyPr/>
                     <a:lstStyle/>
                     <a:p>
-                      <a:pPr algn="l"/>
+                      <a:pPr algn="ctr"/>
                       <a:r>
                         <a:rPr sz="1200" b="1" i="0" spc="300" baseline="0" dirty="0">
                           <a:solidFill>
@@ -11155,7 +11145,7 @@
                     <a:bodyPr/>
                     <a:lstStyle/>
                     <a:p>
-                      <a:pPr algn="l"/>
+                      <a:pPr algn="ctr"/>
                       <a:r>
                         <a:rPr sz="1200" b="1" i="0" spc="300" baseline="0" dirty="0" err="1">
                           <a:solidFill>
@@ -11213,7 +11203,7 @@
                     <a:bodyPr/>
                     <a:lstStyle/>
                     <a:p>
-                      <a:pPr algn="l"/>
+                      <a:pPr algn="ctr"/>
                       <a:r>
                         <a:rPr sz="1200" b="1" i="0" spc="120" baseline="0" dirty="0" err="1">
                           <a:solidFill>
@@ -11264,17 +11254,44 @@
                     <a:bodyPr/>
                     <a:lstStyle/>
                     <a:p>
-                      <a:pPr algn="l"/>
-                      <a:r>
-                        <a:rPr sz="1200" b="0" i="0" spc="120" baseline="0">
-                          <a:solidFill>
-                            <a:srgbClr val="555555"/>
-                          </a:solidFill>
-                          <a:latin typeface="Paperlogy 4 Regular" pitchFamily="2" charset="-127"/>
-                          <a:ea typeface="Paperlogy 4 Regular" pitchFamily="2" charset="-127"/>
-                        </a:rPr>
-                        <a:t>사람이 직접</a:t>
-                      </a:r>
+                      <a:pPr algn="ctr"/>
+                      <a:r>
+                        <a:rPr sz="1200" b="0" i="0" spc="120" baseline="0" dirty="0" err="1">
+                          <a:solidFill>
+                            <a:srgbClr val="555555"/>
+                          </a:solidFill>
+                          <a:latin typeface="Paperlogy 4 Regular" pitchFamily="2" charset="-127"/>
+                          <a:ea typeface="Paperlogy 4 Regular" pitchFamily="2" charset="-127"/>
+                        </a:rPr>
+                        <a:t>사람이</a:t>
+                      </a:r>
+                      <a:r>
+                        <a:rPr sz="1200" b="0" i="0" spc="120" baseline="0" dirty="0">
+                          <a:solidFill>
+                            <a:srgbClr val="555555"/>
+                          </a:solidFill>
+                          <a:latin typeface="Paperlogy 4 Regular" pitchFamily="2" charset="-127"/>
+                          <a:ea typeface="Paperlogy 4 Regular" pitchFamily="2" charset="-127"/>
+                        </a:rPr>
+                        <a:t> </a:t>
+                      </a:r>
+                      <a:r>
+                        <a:rPr sz="1200" b="0" i="0" spc="120" baseline="0" dirty="0" err="1">
+                          <a:solidFill>
+                            <a:srgbClr val="555555"/>
+                          </a:solidFill>
+                          <a:latin typeface="Paperlogy 4 Regular" pitchFamily="2" charset="-127"/>
+                          <a:ea typeface="Paperlogy 4 Regular" pitchFamily="2" charset="-127"/>
+                        </a:rPr>
+                        <a:t>직접</a:t>
+                      </a:r>
+                      <a:endParaRPr sz="1200" b="0" i="0" spc="120" baseline="0" dirty="0">
+                        <a:solidFill>
+                          <a:srgbClr val="555555"/>
+                        </a:solidFill>
+                        <a:latin typeface="Paperlogy 4 Regular" pitchFamily="2" charset="-127"/>
+                        <a:ea typeface="Paperlogy 4 Regular" pitchFamily="2" charset="-127"/>
+                      </a:endParaRPr>
                     </a:p>
                   </a:txBody>
                   <a:tcPr marT="18288" marB="18288" anchor="ctr">
@@ -11288,7 +11305,7 @@
                     <a:bodyPr/>
                     <a:lstStyle/>
                     <a:p>
-                      <a:pPr algn="l"/>
+                      <a:pPr algn="ctr"/>
                       <a:r>
                         <a:rPr sz="1200" b="0" i="0" spc="120" baseline="0">
                           <a:solidFill>
@@ -11312,7 +11329,7 @@
                     <a:bodyPr/>
                     <a:lstStyle/>
                     <a:p>
-                      <a:pPr algn="l"/>
+                      <a:pPr algn="ctr"/>
                       <a:r>
                         <a:rPr sz="1200" b="0" i="0" spc="120" baseline="0">
                           <a:solidFill>
@@ -11343,7 +11360,7 @@
                     <a:bodyPr/>
                     <a:lstStyle/>
                     <a:p>
-                      <a:pPr algn="l"/>
+                      <a:pPr algn="ctr"/>
                       <a:r>
                         <a:rPr sz="1200" b="1" i="0" spc="120" baseline="0" dirty="0" err="1">
                           <a:solidFill>
@@ -11394,7 +11411,7 @@
                     <a:bodyPr/>
                     <a:lstStyle/>
                     <a:p>
-                      <a:pPr algn="l"/>
+                      <a:pPr algn="ctr"/>
                       <a:r>
                         <a:rPr sz="1200" b="0" i="0" spc="120" baseline="0" dirty="0" err="1">
                           <a:solidFill>
@@ -11485,7 +11502,7 @@
                     <a:bodyPr/>
                     <a:lstStyle/>
                     <a:p>
-                      <a:pPr algn="l"/>
+                      <a:pPr algn="ctr"/>
                       <a:r>
                         <a:rPr sz="1200" b="0" i="0" spc="120" baseline="0">
                           <a:solidFill>
@@ -11509,7 +11526,7 @@
                     <a:bodyPr/>
                     <a:lstStyle/>
                     <a:p>
-                      <a:pPr algn="l"/>
+                      <a:pPr algn="ctr"/>
                       <a:r>
                         <a:rPr sz="1200" b="0" i="0" spc="120" baseline="0">
                           <a:solidFill>
@@ -11540,17 +11557,44 @@
                     <a:bodyPr/>
                     <a:lstStyle/>
                     <a:p>
-                      <a:pPr algn="l"/>
-                      <a:r>
-                        <a:rPr sz="1200" b="1" i="0" spc="120" baseline="0">
+                      <a:pPr algn="ctr"/>
+                      <a:r>
+                        <a:rPr sz="1200" b="1" i="0" spc="120" baseline="0" dirty="0" err="1">
                           <a:solidFill>
                             <a:srgbClr val="1F3B57"/>
                           </a:solidFill>
                           <a:latin typeface="Paperlogy 4 Regular" pitchFamily="2" charset="-127"/>
                           <a:ea typeface="Paperlogy 4 Regular" pitchFamily="2" charset="-127"/>
                         </a:rPr>
-                        <a:t>품질 검증</a:t>
-                      </a:r>
+                        <a:t>품질</a:t>
+                      </a:r>
+                      <a:r>
+                        <a:rPr sz="1200" b="1" i="0" spc="120" baseline="0" dirty="0">
+                          <a:solidFill>
+                            <a:srgbClr val="1F3B57"/>
+                          </a:solidFill>
+                          <a:latin typeface="Paperlogy 4 Regular" pitchFamily="2" charset="-127"/>
+                          <a:ea typeface="Paperlogy 4 Regular" pitchFamily="2" charset="-127"/>
+                        </a:rPr>
+                        <a:t> </a:t>
+                      </a:r>
+                      <a:r>
+                        <a:rPr sz="1200" b="1" i="0" spc="120" baseline="0" dirty="0" err="1">
+                          <a:solidFill>
+                            <a:srgbClr val="1F3B57"/>
+                          </a:solidFill>
+                          <a:latin typeface="Paperlogy 4 Regular" pitchFamily="2" charset="-127"/>
+                          <a:ea typeface="Paperlogy 4 Regular" pitchFamily="2" charset="-127"/>
+                        </a:rPr>
+                        <a:t>검증</a:t>
+                      </a:r>
+                      <a:endParaRPr sz="1200" b="1" i="0" spc="120" baseline="0" dirty="0">
+                        <a:solidFill>
+                          <a:srgbClr val="1F3B57"/>
+                        </a:solidFill>
+                        <a:latin typeface="Paperlogy 4 Regular" pitchFamily="2" charset="-127"/>
+                        <a:ea typeface="Paperlogy 4 Regular" pitchFamily="2" charset="-127"/>
+                      </a:endParaRPr>
                     </a:p>
                   </a:txBody>
                   <a:tcPr marT="18288" marB="18288" anchor="ctr">
@@ -11564,7 +11608,7 @@
                     <a:bodyPr/>
                     <a:lstStyle/>
                     <a:p>
-                      <a:pPr algn="l"/>
+                      <a:pPr algn="ctr"/>
                       <a:r>
                         <a:rPr sz="1200" b="0" i="0" spc="120" baseline="0" dirty="0" err="1">
                           <a:solidFill>
@@ -11615,17 +11659,74 @@
                     <a:bodyPr/>
                     <a:lstStyle/>
                     <a:p>
-                      <a:pPr algn="l"/>
-                      <a:r>
-                        <a:rPr sz="1200" b="0" i="0" spc="120" baseline="0">
-                          <a:solidFill>
-                            <a:srgbClr val="555555"/>
-                          </a:solidFill>
-                          <a:latin typeface="Paperlogy 4 Regular" pitchFamily="2" charset="-127"/>
-                          <a:ea typeface="Paperlogy 4 Regular" pitchFamily="2" charset="-127"/>
-                        </a:rPr>
-                        <a:t>AI 자동검증 + 사람 판단</a:t>
-                      </a:r>
+                      <a:pPr algn="ctr"/>
+                      <a:r>
+                        <a:rPr sz="1200" b="0" i="0" spc="120" baseline="0" dirty="0">
+                          <a:solidFill>
+                            <a:srgbClr val="555555"/>
+                          </a:solidFill>
+                          <a:latin typeface="Paperlogy 4 Regular" pitchFamily="2" charset="-127"/>
+                          <a:ea typeface="Paperlogy 4 Regular" pitchFamily="2" charset="-127"/>
+                        </a:rPr>
+                        <a:t>AI </a:t>
+                      </a:r>
+                      <a:r>
+                        <a:rPr sz="1200" b="0" i="0" spc="120" baseline="0" dirty="0" err="1">
+                          <a:solidFill>
+                            <a:srgbClr val="555555"/>
+                          </a:solidFill>
+                          <a:latin typeface="Paperlogy 4 Regular" pitchFamily="2" charset="-127"/>
+                          <a:ea typeface="Paperlogy 4 Regular" pitchFamily="2" charset="-127"/>
+                        </a:rPr>
+                        <a:t>자동검증</a:t>
+                      </a:r>
+                      <a:r>
+                        <a:rPr sz="1200" b="0" i="0" spc="120" baseline="0" dirty="0">
+                          <a:solidFill>
+                            <a:srgbClr val="555555"/>
+                          </a:solidFill>
+                          <a:latin typeface="Paperlogy 4 Regular" pitchFamily="2" charset="-127"/>
+                          <a:ea typeface="Paperlogy 4 Regular" pitchFamily="2" charset="-127"/>
+                        </a:rPr>
+                        <a:t> + </a:t>
+                      </a:r>
+                      <a:r>
+                        <a:rPr sz="1200" b="0" i="0" spc="120" baseline="0" dirty="0" err="1">
+                          <a:solidFill>
+                            <a:srgbClr val="555555"/>
+                          </a:solidFill>
+                          <a:latin typeface="Paperlogy 4 Regular" pitchFamily="2" charset="-127"/>
+                          <a:ea typeface="Paperlogy 4 Regular" pitchFamily="2" charset="-127"/>
+                        </a:rPr>
+                        <a:t>사람</a:t>
+                      </a:r>
+                      <a:r>
+                        <a:rPr sz="1200" b="0" i="0" spc="120" baseline="0" dirty="0">
+                          <a:solidFill>
+                            <a:srgbClr val="555555"/>
+                          </a:solidFill>
+                          <a:latin typeface="Paperlogy 4 Regular" pitchFamily="2" charset="-127"/>
+                          <a:ea typeface="Paperlogy 4 Regular" pitchFamily="2" charset="-127"/>
+                        </a:rPr>
+                        <a:t> </a:t>
+                      </a:r>
+                      <a:r>
+                        <a:rPr sz="1200" b="0" i="0" spc="120" baseline="0" dirty="0" err="1">
+                          <a:solidFill>
+                            <a:srgbClr val="555555"/>
+                          </a:solidFill>
+                          <a:latin typeface="Paperlogy 4 Regular" pitchFamily="2" charset="-127"/>
+                          <a:ea typeface="Paperlogy 4 Regular" pitchFamily="2" charset="-127"/>
+                        </a:rPr>
+                        <a:t>판단</a:t>
+                      </a:r>
+                      <a:endParaRPr sz="1200" b="0" i="0" spc="120" baseline="0" dirty="0">
+                        <a:solidFill>
+                          <a:srgbClr val="555555"/>
+                        </a:solidFill>
+                        <a:latin typeface="Paperlogy 4 Regular" pitchFamily="2" charset="-127"/>
+                        <a:ea typeface="Paperlogy 4 Regular" pitchFamily="2" charset="-127"/>
+                      </a:endParaRPr>
                     </a:p>
                   </a:txBody>
                   <a:tcPr marT="18288" marB="18288" anchor="ctr">
@@ -11639,7 +11740,7 @@
                     <a:bodyPr/>
                     <a:lstStyle/>
                     <a:p>
-                      <a:pPr algn="l"/>
+                      <a:pPr algn="ctr"/>
                       <a:r>
                         <a:rPr sz="1200" b="0" i="0" spc="120" baseline="0">
                           <a:solidFill>
@@ -11670,17 +11771,44 @@
                     <a:bodyPr/>
                     <a:lstStyle/>
                     <a:p>
-                      <a:pPr algn="l"/>
-                      <a:r>
-                        <a:rPr sz="1200" b="1" i="0" spc="120" baseline="0">
+                      <a:pPr algn="ctr"/>
+                      <a:r>
+                        <a:rPr sz="1200" b="1" i="0" spc="120" baseline="0" dirty="0" err="1">
                           <a:solidFill>
                             <a:srgbClr val="1F3B57"/>
                           </a:solidFill>
                           <a:latin typeface="Paperlogy 4 Regular" pitchFamily="2" charset="-127"/>
                           <a:ea typeface="Paperlogy 4 Regular" pitchFamily="2" charset="-127"/>
                         </a:rPr>
-                        <a:t>지식 축적</a:t>
-                      </a:r>
+                        <a:t>지식</a:t>
+                      </a:r>
+                      <a:r>
+                        <a:rPr sz="1200" b="1" i="0" spc="120" baseline="0" dirty="0">
+                          <a:solidFill>
+                            <a:srgbClr val="1F3B57"/>
+                          </a:solidFill>
+                          <a:latin typeface="Paperlogy 4 Regular" pitchFamily="2" charset="-127"/>
+                          <a:ea typeface="Paperlogy 4 Regular" pitchFamily="2" charset="-127"/>
+                        </a:rPr>
+                        <a:t> </a:t>
+                      </a:r>
+                      <a:r>
+                        <a:rPr sz="1200" b="1" i="0" spc="120" baseline="0" dirty="0" err="1">
+                          <a:solidFill>
+                            <a:srgbClr val="1F3B57"/>
+                          </a:solidFill>
+                          <a:latin typeface="Paperlogy 4 Regular" pitchFamily="2" charset="-127"/>
+                          <a:ea typeface="Paperlogy 4 Regular" pitchFamily="2" charset="-127"/>
+                        </a:rPr>
+                        <a:t>축적</a:t>
+                      </a:r>
+                      <a:endParaRPr sz="1200" b="1" i="0" spc="120" baseline="0" dirty="0">
+                        <a:solidFill>
+                          <a:srgbClr val="1F3B57"/>
+                        </a:solidFill>
+                        <a:latin typeface="Paperlogy 4 Regular" pitchFamily="2" charset="-127"/>
+                        <a:ea typeface="Paperlogy 4 Regular" pitchFamily="2" charset="-127"/>
+                      </a:endParaRPr>
                     </a:p>
                   </a:txBody>
                   <a:tcPr marT="18288" marB="18288" anchor="ctr">
@@ -11694,7 +11822,7 @@
                     <a:bodyPr/>
                     <a:lstStyle/>
                     <a:p>
-                      <a:pPr algn="l"/>
+                      <a:pPr algn="ctr"/>
                       <a:r>
                         <a:rPr sz="1200" b="0" i="0" spc="120" baseline="0" dirty="0" err="1">
                           <a:solidFill>
@@ -11765,7 +11893,7 @@
                     <a:bodyPr/>
                     <a:lstStyle/>
                     <a:p>
-                      <a:pPr algn="l"/>
+                      <a:pPr algn="ctr"/>
                       <a:r>
                         <a:rPr sz="1200" b="0" i="0" spc="120" baseline="0" dirty="0" err="1">
                           <a:solidFill>
@@ -11836,7 +11964,7 @@
                     <a:bodyPr/>
                     <a:lstStyle/>
                     <a:p>
-                      <a:pPr algn="l"/>
+                      <a:pPr algn="ctr"/>
                       <a:r>
                         <a:rPr sz="1200" b="0" i="0" spc="120" baseline="0">
                           <a:solidFill>
@@ -11867,16 +11995,46 @@
                     <a:bodyPr/>
                     <a:lstStyle/>
                     <a:p>
-                      <a:pPr algn="l"/>
-                      <a:r>
-                        <a:rPr sz="1200" b="1" i="0" spc="120" baseline="0">
+                      <a:pPr algn="ctr"/>
+                      <a:r>
+                        <a:rPr sz="1200" b="1" i="0" spc="120" baseline="0" dirty="0" err="1">
                           <a:solidFill>
                             <a:srgbClr val="1F3B57"/>
                           </a:solidFill>
                           <a:latin typeface="Paperlogy 4 Regular" pitchFamily="2" charset="-127"/>
                           <a:ea typeface="Paperlogy 4 Regular" pitchFamily="2" charset="-127"/>
                         </a:rPr>
-                        <a:t>비용 (목표)</a:t>
+                        <a:t>비용</a:t>
+                      </a:r>
+                      <a:r>
+                        <a:rPr sz="1200" b="1" i="0" spc="120" baseline="0" dirty="0">
+                          <a:solidFill>
+                            <a:srgbClr val="1F3B57"/>
+                          </a:solidFill>
+                          <a:latin typeface="Paperlogy 4 Regular" pitchFamily="2" charset="-127"/>
+                          <a:ea typeface="Paperlogy 4 Regular" pitchFamily="2" charset="-127"/>
+                        </a:rPr>
+                        <a:t> (</a:t>
+                      </a:r>
+                      <a:r>
+                        <a:rPr sz="1200" b="1" i="0" spc="120" baseline="0" dirty="0" err="1">
+                          <a:solidFill>
+                            <a:srgbClr val="1F3B57"/>
+                          </a:solidFill>
+                          <a:latin typeface="Paperlogy 4 Regular" pitchFamily="2" charset="-127"/>
+                          <a:ea typeface="Paperlogy 4 Regular" pitchFamily="2" charset="-127"/>
+                        </a:rPr>
+                        <a:t>목표</a:t>
+                      </a:r>
+                      <a:r>
+                        <a:rPr sz="1200" b="1" i="0" spc="120" baseline="0" dirty="0">
+                          <a:solidFill>
+                            <a:srgbClr val="1F3B57"/>
+                          </a:solidFill>
+                          <a:latin typeface="Paperlogy 4 Regular" pitchFamily="2" charset="-127"/>
+                          <a:ea typeface="Paperlogy 4 Regular" pitchFamily="2" charset="-127"/>
+                        </a:rPr>
+                        <a:t>)</a:t>
                       </a:r>
                     </a:p>
                   </a:txBody>
@@ -11891,7 +12049,7 @@
                     <a:bodyPr/>
                     <a:lstStyle/>
                     <a:p>
-                      <a:pPr algn="l"/>
+                      <a:pPr algn="ctr"/>
                       <a:r>
                         <a:rPr sz="1200" b="0" i="0" spc="120" baseline="0" dirty="0" err="1">
                           <a:solidFill>
@@ -11942,7 +12100,7 @@
                     <a:bodyPr/>
                     <a:lstStyle/>
                     <a:p>
-                      <a:pPr algn="l"/>
+                      <a:pPr algn="ctr"/>
                       <a:r>
                         <a:rPr sz="1200" b="0" i="0" spc="120" baseline="0" dirty="0">
                           <a:solidFill>
@@ -12003,7 +12161,7 @@
                     <a:bodyPr/>
                     <a:lstStyle/>
                     <a:p>
-                      <a:pPr algn="l"/>
+                      <a:pPr algn="ctr"/>
                       <a:r>
                         <a:rPr sz="1200" b="0" i="0" spc="120" baseline="0" dirty="0">
                           <a:solidFill>
@@ -13012,7 +13170,7 @@
         </p:nvSpPr>
         <p:spPr>
           <a:xfrm>
-            <a:off x="1606730" y="2123567"/>
+            <a:off x="955853" y="5364780"/>
             <a:ext cx="2769327" cy="653690"/>
           </a:xfrm>
           <a:prstGeom prst="roundRect">
@@ -13098,7 +13256,7 @@
         </p:nvSpPr>
         <p:spPr>
           <a:xfrm>
-            <a:off x="5110961" y="2123567"/>
+            <a:off x="4460084" y="5364780"/>
             <a:ext cx="2887599" cy="653690"/>
           </a:xfrm>
           <a:prstGeom prst="roundRect">
@@ -13204,7 +13362,7 @@
         </p:nvSpPr>
         <p:spPr>
           <a:xfrm>
-            <a:off x="8703706" y="2123567"/>
+            <a:off x="8052829" y="5364780"/>
             <a:ext cx="2887599" cy="653690"/>
           </a:xfrm>
           <a:prstGeom prst="roundRect">
@@ -13299,7 +13457,7 @@
         </p:nvCxnSpPr>
         <p:spPr>
           <a:xfrm>
-            <a:off x="4550831" y="2450412"/>
+            <a:off x="3899954" y="5691625"/>
             <a:ext cx="411481" cy="0"/>
           </a:xfrm>
           <a:prstGeom prst="line">
@@ -13338,7 +13496,7 @@
         </p:nvCxnSpPr>
         <p:spPr>
           <a:xfrm>
-            <a:off x="8145393" y="2450412"/>
+            <a:off x="7494516" y="5691625"/>
             <a:ext cx="411480" cy="0"/>
           </a:xfrm>
           <a:prstGeom prst="line">
@@ -13369,21 +13527,27 @@
       </p:cxnSp>
       <p:graphicFrame>
         <p:nvGraphicFramePr>
-          <p:cNvPr id="11" name="Table 10"/>
+          <p:cNvPr id="12" name="Table 4">
+            <a:extLst>
+              <a:ext uri="{FF2B5EF4-FFF2-40B4-BE49-F238E27FC236}">
+                <a16:creationId xmlns:a16="http://schemas.microsoft.com/office/drawing/2014/main" id="{89FEF0B2-A184-907B-EBC6-0ED268094C13}"/>
+              </a:ext>
+            </a:extLst>
+          </p:cNvPr>
           <p:cNvGraphicFramePr>
             <a:graphicFrameLocks noGrp="1"/>
           </p:cNvGraphicFramePr>
           <p:nvPr>
             <p:extLst>
               <p:ext uri="{D42A27DB-BD31-4B8C-83A1-F6EECF244321}">
-                <p14:modId xmlns:p14="http://schemas.microsoft.com/office/powerpoint/2010/main" val="1519017872"/>
+                <p14:modId xmlns:p14="http://schemas.microsoft.com/office/powerpoint/2010/main" val="1846905475"/>
               </p:ext>
             </p:extLst>
           </p:nvPr>
         </p:nvGraphicFramePr>
         <p:xfrm>
-          <a:off x="457200" y="3073131"/>
-          <a:ext cx="11274550" cy="2633741"/>
+          <a:off x="428400" y="1875600"/>
+          <a:ext cx="11274551" cy="3134358"/>
         </p:xfrm>
         <a:graphic>
           <a:graphicData uri="http://schemas.openxmlformats.org/drawingml/2006/table">
@@ -13392,28 +13556,28 @@
                 <a:tableStyleId>{5C22544A-7EE6-4342-B048-85BDC9FD1C3A}</a:tableStyleId>
               </a:tblPr>
               <a:tblGrid>
-                <a:gridCol w="897973">
+                <a:gridCol w="949568">
                   <a:extLst>
                     <a:ext uri="{9D8B030D-6E8A-4147-A177-3AD203B41FA5}">
                       <a16:colId xmlns:a16="http://schemas.microsoft.com/office/drawing/2014/main" val="20000"/>
                     </a:ext>
                   </a:extLst>
                 </a:gridCol>
-                <a:gridCol w="3376315">
+                <a:gridCol w="3200400">
                   <a:extLst>
                     <a:ext uri="{9D8B030D-6E8A-4147-A177-3AD203B41FA5}">
                       <a16:colId xmlns:a16="http://schemas.microsoft.com/office/drawing/2014/main" val="20001"/>
                     </a:ext>
                   </a:extLst>
                 </a:gridCol>
-                <a:gridCol w="3540642">
+                <a:gridCol w="3560885">
                   <a:extLst>
                     <a:ext uri="{9D8B030D-6E8A-4147-A177-3AD203B41FA5}">
                       <a16:colId xmlns:a16="http://schemas.microsoft.com/office/drawing/2014/main" val="20002"/>
                     </a:ext>
                   </a:extLst>
                 </a:gridCol>
-                <a:gridCol w="3459620">
+                <a:gridCol w="3563698">
                   <a:extLst>
                     <a:ext uri="{9D8B030D-6E8A-4147-A177-3AD203B41FA5}">
                       <a16:colId xmlns:a16="http://schemas.microsoft.com/office/drawing/2014/main" val="20003"/>
@@ -13421,28 +13585,140 @@
                   </a:extLst>
                 </a:gridCol>
               </a:tblGrid>
-              <a:tr h="858789">
+              <a:tr h="485454">
                 <a:tc>
                   <a:txBody>
                     <a:bodyPr/>
                     <a:lstStyle/>
                     <a:p>
-                      <a:pPr algn="ctr">
+                      <a:pPr algn="ctr"/>
+                      <a:endParaRPr sz="1200" b="1" i="0" spc="300" baseline="0" dirty="0">
+                        <a:solidFill>
+                          <a:srgbClr val="FFFFFF"/>
+                        </a:solidFill>
+                        <a:latin typeface="Paperlogy 4 Regular" pitchFamily="2" charset="-127"/>
+                        <a:ea typeface="Paperlogy 4 Regular" pitchFamily="2" charset="-127"/>
+                      </a:endParaRPr>
+                    </a:p>
+                  </a:txBody>
+                  <a:tcPr marT="18288" marB="18288" anchor="ctr">
+                    <a:solidFill>
+                      <a:srgbClr val="1B4F78"/>
+                    </a:solidFill>
+                  </a:tcPr>
+                </a:tc>
+                <a:tc>
+                  <a:txBody>
+                    <a:bodyPr/>
+                    <a:lstStyle/>
+                    <a:p>
+                      <a:pPr algn="ctr"/>
+                      <a:r>
+                        <a:rPr lang="ko-KR" altLang="en-US" sz="1200" b="1" i="0" spc="300" baseline="0" dirty="0">
+                          <a:solidFill>
+                            <a:srgbClr val="FFFFFF"/>
+                          </a:solidFill>
+                          <a:latin typeface="Paperlogy 4 Regular" pitchFamily="2" charset="-127"/>
+                          <a:ea typeface="Paperlogy 4 Regular" pitchFamily="2" charset="-127"/>
+                        </a:rPr>
+                        <a:t>방법론 검증</a:t>
+                      </a:r>
+                    </a:p>
+                  </a:txBody>
+                  <a:tcPr marT="18288" marB="18288" anchor="ctr">
+                    <a:solidFill>
+                      <a:srgbClr val="1B4F78"/>
+                    </a:solidFill>
+                  </a:tcPr>
+                </a:tc>
+                <a:tc>
+                  <a:txBody>
+                    <a:bodyPr/>
+                    <a:lstStyle/>
+                    <a:p>
+                      <a:pPr algn="ctr"/>
+                      <a:r>
+                        <a:rPr lang="ko-KR" altLang="en-US" sz="1200" b="1" i="0" spc="300" baseline="0" dirty="0">
+                          <a:solidFill>
+                            <a:srgbClr val="FFFFFF"/>
+                          </a:solidFill>
+                          <a:latin typeface="Paperlogy 4 Regular" pitchFamily="2" charset="-127"/>
+                          <a:ea typeface="Paperlogy 4 Regular" pitchFamily="2" charset="-127"/>
+                        </a:rPr>
+                        <a:t>범용성 검증</a:t>
+                      </a:r>
+                    </a:p>
+                  </a:txBody>
+                  <a:tcPr marT="18288" marB="18288" anchor="ctr">
+                    <a:solidFill>
+                      <a:srgbClr val="1B4F78"/>
+                    </a:solidFill>
+                  </a:tcPr>
+                </a:tc>
+                <a:tc>
+                  <a:txBody>
+                    <a:bodyPr/>
+                    <a:lstStyle/>
+                    <a:p>
+                      <a:pPr algn="ctr"/>
+                      <a:r>
+                        <a:rPr lang="ko-KR" altLang="en-US" sz="1200" b="1" i="0" spc="300" baseline="0" dirty="0">
+                          <a:solidFill>
+                            <a:srgbClr val="FFFFFF"/>
+                          </a:solidFill>
+                          <a:latin typeface="Paperlogy 4 Regular" pitchFamily="2" charset="-127"/>
+                          <a:ea typeface="Paperlogy 4 Regular" pitchFamily="2" charset="-127"/>
+                        </a:rPr>
+                        <a:t>조직표준</a:t>
+                      </a:r>
+                    </a:p>
+                  </a:txBody>
+                  <a:tcPr marT="18288" marB="18288" anchor="ctr">
+                    <a:solidFill>
+                      <a:srgbClr val="1B4F78"/>
+                    </a:solidFill>
+                  </a:tcPr>
+                </a:tc>
+                <a:extLst>
+                  <a:ext uri="{0D108BD9-81ED-4DB2-BD59-A6C34878D82A}">
+                    <a16:rowId xmlns:a16="http://schemas.microsoft.com/office/drawing/2014/main" val="10000"/>
+                  </a:ext>
+                </a:extLst>
+              </a:tr>
+              <a:tr h="457200">
+                <a:tc>
+                  <a:txBody>
+                    <a:bodyPr/>
+                    <a:lstStyle/>
+                    <a:p>
+                      <a:pPr marL="0" marR="0" indent="0" algn="ctr" defTabSz="457200" rtl="0" eaLnBrk="1" fontAlgn="auto" latinLnBrk="0" hangingPunct="1">
                         <a:lnSpc>
-                          <a:spcPct val="150000"/>
+                          <a:spcPct val="100000"/>
                         </a:lnSpc>
+                        <a:spcBef>
+                          <a:spcPts val="0"/>
+                        </a:spcBef>
+                        <a:spcAft>
+                          <a:spcPts val="0"/>
+                        </a:spcAft>
+                        <a:buClrTx/>
+                        <a:buSzTx/>
+                        <a:buFontTx/>
+                        <a:buNone/>
+                        <a:tabLst/>
+                        <a:defRPr/>
                       </a:pPr>
                       <a:r>
-                        <a:rPr sz="1300" b="1" i="0" spc="300" baseline="0" dirty="0" err="1">
+                        <a:rPr lang="ko-KR" altLang="en-US" sz="1200" b="1" i="0" spc="120" baseline="0" dirty="0">
                           <a:solidFill>
                             <a:srgbClr val="1F3B57"/>
                           </a:solidFill>
                           <a:latin typeface="Paperlogy 4 Regular" pitchFamily="2" charset="-127"/>
                           <a:ea typeface="Paperlogy 4 Regular" pitchFamily="2" charset="-127"/>
                         </a:rPr>
-                        <a:t>범위</a:t>
-                      </a:r>
-                      <a:endParaRPr sz="1300" b="1" i="0" spc="300" baseline="0" dirty="0">
+                        <a:t>목표</a:t>
+                      </a:r>
+                      <a:endParaRPr sz="1200" b="1" i="0" spc="120" baseline="0" dirty="0">
                         <a:solidFill>
                           <a:srgbClr val="1F3B57"/>
                         </a:solidFill>
@@ -13462,13 +13738,13 @@
                     <a:bodyPr/>
                     <a:lstStyle/>
                     <a:p>
-                      <a:pPr algn="l">
+                      <a:pPr algn="ctr">
                         <a:lnSpc>
                           <a:spcPct val="150000"/>
                         </a:lnSpc>
                       </a:pPr>
                       <a:r>
-                        <a:rPr lang="en-US" altLang="ko-KR" sz="1300" b="0" i="0" spc="120" baseline="0" dirty="0">
+                        <a:rPr lang="en-US" altLang="ko-KR" sz="1200" b="0" i="0" spc="120" baseline="0" dirty="0">
                           <a:solidFill>
                             <a:srgbClr val="555555"/>
                           </a:solidFill>
@@ -13478,7 +13754,65 @@
                         <a:t>.</a:t>
                       </a:r>
                       <a:r>
-                        <a:rPr lang="ko-KR" altLang="en-US" sz="1300" b="0" i="0" spc="120" baseline="0" dirty="0">
+                        <a:rPr lang="ko-KR" altLang="en-US" sz="1200" b="0" i="0" spc="120" baseline="0" dirty="0">
+                          <a:solidFill>
+                            <a:srgbClr val="555555"/>
+                          </a:solidFill>
+                          <a:latin typeface="Paperlogy 4 Regular" pitchFamily="2" charset="-127"/>
+                          <a:ea typeface="Paperlogy 4 Regular" pitchFamily="2" charset="-127"/>
+                        </a:rPr>
+                        <a:t> 방법론 실증 </a:t>
+                      </a:r>
+                      <a:br>
+                        <a:rPr lang="ko-KR" altLang="en-US" sz="1200" b="0" i="0" spc="120" baseline="0" dirty="0">
+                          <a:solidFill>
+                            <a:srgbClr val="555555"/>
+                          </a:solidFill>
+                          <a:latin typeface="Paperlogy 4 Regular" pitchFamily="2" charset="-127"/>
+                          <a:ea typeface="Paperlogy 4 Regular" pitchFamily="2" charset="-127"/>
+                        </a:rPr>
+                      </a:br>
+                      <a:r>
+                        <a:rPr lang="en-US" altLang="ko-KR" sz="1200" b="0" i="0" spc="120" baseline="0" dirty="0">
+                          <a:solidFill>
+                            <a:srgbClr val="555555"/>
+                          </a:solidFill>
+                          <a:latin typeface="Paperlogy 4 Regular" pitchFamily="2" charset="-127"/>
+                          <a:ea typeface="Paperlogy 4 Regular" pitchFamily="2" charset="-127"/>
+                        </a:rPr>
+                        <a:t>.</a:t>
+                      </a:r>
+                      <a:r>
+                        <a:rPr lang="ko-KR" altLang="en-US" sz="1200" b="0" i="0" spc="120" baseline="0" dirty="0">
+                          <a:solidFill>
+                            <a:srgbClr val="555555"/>
+                          </a:solidFill>
+                          <a:latin typeface="Paperlogy 4 Regular" pitchFamily="2" charset="-127"/>
+                          <a:ea typeface="Paperlogy 4 Regular" pitchFamily="2" charset="-127"/>
+                        </a:rPr>
+                        <a:t> 비용산정 모델 초안 </a:t>
+                      </a:r>
+                      <a:br>
+                        <a:rPr lang="ko-KR" altLang="en-US" sz="1200" b="0" i="0" spc="120" baseline="0" dirty="0">
+                          <a:solidFill>
+                            <a:srgbClr val="555555"/>
+                          </a:solidFill>
+                          <a:latin typeface="Paperlogy 4 Regular" pitchFamily="2" charset="-127"/>
+                          <a:ea typeface="Paperlogy 4 Regular" pitchFamily="2" charset="-127"/>
+                        </a:rPr>
+                      </a:br>
+                      <a:r>
+                        <a:rPr lang="en-US" altLang="ko-KR" sz="1200" b="0" i="0" spc="120" baseline="0" dirty="0">
+                          <a:solidFill>
+                            <a:srgbClr val="555555"/>
+                          </a:solidFill>
+                          <a:latin typeface="Paperlogy 4 Regular" pitchFamily="2" charset="-127"/>
+                          <a:ea typeface="Paperlogy 4 Regular" pitchFamily="2" charset="-127"/>
+                        </a:rPr>
+                        <a:t>.</a:t>
+                      </a:r>
+                      <a:r>
+                        <a:rPr lang="ko-KR" altLang="en-US" sz="1200" b="0" i="0" spc="120" baseline="0" dirty="0">
                           <a:solidFill>
                             <a:srgbClr val="555555"/>
                           </a:solidFill>
@@ -13488,83 +13822,24 @@
                         <a:t> </a:t>
                       </a:r>
                       <a:r>
-                        <a:rPr sz="1300" b="0" i="0" spc="120" baseline="0" dirty="0" err="1">
-                          <a:solidFill>
-                            <a:srgbClr val="555555"/>
-                          </a:solidFill>
-                          <a:latin typeface="Paperlogy 4 Regular" pitchFamily="2" charset="-127"/>
-                          <a:ea typeface="Paperlogy 4 Regular" pitchFamily="2" charset="-127"/>
-                        </a:rPr>
-                        <a:t>Order+Payment</a:t>
-                      </a:r>
-                      <a:r>
-                        <a:rPr sz="1300" b="0" i="0" spc="120" baseline="0" dirty="0">
-                          <a:solidFill>
-                            <a:srgbClr val="555555"/>
-                          </a:solidFill>
-                          <a:latin typeface="Paperlogy 4 Regular" pitchFamily="2" charset="-127"/>
-                          <a:ea typeface="Paperlogy 4 Regular" pitchFamily="2" charset="-127"/>
-                        </a:rPr>
-                        <a:t> </a:t>
-                      </a:r>
-                      <a:br>
-                        <a:rPr lang="en-US" sz="1300" b="0" i="0" spc="120" baseline="0" dirty="0">
-                          <a:solidFill>
-                            <a:srgbClr val="555555"/>
-                          </a:solidFill>
-                          <a:latin typeface="Paperlogy 4 Regular" pitchFamily="2" charset="-127"/>
-                          <a:ea typeface="Paperlogy 4 Regular" pitchFamily="2" charset="-127"/>
-                        </a:rPr>
-                      </a:br>
-                      <a:r>
-                        <a:rPr sz="1300" b="0" i="0" spc="120" baseline="0" dirty="0">
-                          <a:solidFill>
-                            <a:srgbClr val="555555"/>
-                          </a:solidFill>
-                          <a:latin typeface="Paperlogy 4 Regular" pitchFamily="2" charset="-127"/>
-                          <a:ea typeface="Paperlogy 4 Regular" pitchFamily="2" charset="-127"/>
-                        </a:rPr>
-                        <a:t>(</a:t>
-                      </a:r>
-                      <a:r>
-                        <a:rPr sz="1300" b="0" i="0" spc="120" baseline="0" dirty="0" err="1">
-                          <a:solidFill>
-                            <a:srgbClr val="555555"/>
-                          </a:solidFill>
-                          <a:latin typeface="Paperlogy 4 Regular" pitchFamily="2" charset="-127"/>
-                          <a:ea typeface="Paperlogy 4 Regular" pitchFamily="2" charset="-127"/>
-                        </a:rPr>
-                        <a:t>연관</a:t>
-                      </a:r>
-                      <a:r>
-                        <a:rPr sz="1300" b="0" i="0" spc="120" baseline="0" dirty="0">
-                          <a:solidFill>
-                            <a:srgbClr val="555555"/>
-                          </a:solidFill>
-                          <a:latin typeface="Paperlogy 4 Regular" pitchFamily="2" charset="-127"/>
-                          <a:ea typeface="Paperlogy 4 Regular" pitchFamily="2" charset="-127"/>
-                        </a:rPr>
-                        <a:t> </a:t>
-                      </a:r>
-                      <a:r>
-                        <a:rPr sz="1300" b="0" i="0" spc="120" baseline="0" dirty="0" err="1">
-                          <a:solidFill>
-                            <a:srgbClr val="555555"/>
-                          </a:solidFill>
-                          <a:latin typeface="Paperlogy 4 Regular" pitchFamily="2" charset="-127"/>
-                          <a:ea typeface="Paperlogy 4 Regular" pitchFamily="2" charset="-127"/>
-                        </a:rPr>
-                        <a:t>도메인은</a:t>
-                      </a:r>
-                      <a:r>
-                        <a:rPr sz="1300" b="0" i="0" spc="120" baseline="0" dirty="0">
-                          <a:solidFill>
-                            <a:srgbClr val="555555"/>
-                          </a:solidFill>
-                          <a:latin typeface="Paperlogy 4 Regular" pitchFamily="2" charset="-127"/>
-                          <a:ea typeface="Paperlogy 4 Regular" pitchFamily="2" charset="-127"/>
-                        </a:rPr>
-                        <a:t> Mock)</a:t>
+                        <a:rPr lang="en-US" altLang="ko-KR" sz="1200" b="0" i="0" spc="120" baseline="0" dirty="0">
+                          <a:solidFill>
+                            <a:srgbClr val="555555"/>
+                          </a:solidFill>
+                          <a:latin typeface="Paperlogy 4 Regular" pitchFamily="2" charset="-127"/>
+                          <a:ea typeface="Paperlogy 4 Regular" pitchFamily="2" charset="-127"/>
+                        </a:rPr>
+                        <a:t>2</a:t>
+                      </a:r>
+                      <a:r>
+                        <a:rPr lang="ko-KR" altLang="en-US" sz="1200" b="0" i="0" spc="120" baseline="0" dirty="0">
+                          <a:solidFill>
+                            <a:srgbClr val="555555"/>
+                          </a:solidFill>
+                          <a:latin typeface="Paperlogy 4 Regular" pitchFamily="2" charset="-127"/>
+                          <a:ea typeface="Paperlogy 4 Regular" pitchFamily="2" charset="-127"/>
+                        </a:rPr>
+                        <a:t>개 도메인 자산 세트</a:t>
                       </a:r>
                     </a:p>
                   </a:txBody>
@@ -13579,13 +13854,13 @@
                     <a:bodyPr/>
                     <a:lstStyle/>
                     <a:p>
-                      <a:pPr algn="l">
+                      <a:pPr algn="ctr">
                         <a:lnSpc>
                           <a:spcPct val="150000"/>
                         </a:lnSpc>
                       </a:pPr>
                       <a:r>
-                        <a:rPr lang="en-US" altLang="ko-KR" sz="1300" b="0" i="0" spc="120" baseline="0" dirty="0">
+                        <a:rPr lang="en-US" altLang="ko-KR" sz="1200" b="0" i="0" spc="120" baseline="0" dirty="0">
                           <a:solidFill>
                             <a:srgbClr val="555555"/>
                           </a:solidFill>
@@ -13595,67 +13870,17 @@
                         <a:t>.</a:t>
                       </a:r>
                       <a:r>
-                        <a:rPr lang="ko-KR" altLang="en-US" sz="1300" b="0" i="0" spc="120" baseline="0" dirty="0">
-                          <a:solidFill>
-                            <a:srgbClr val="555555"/>
-                          </a:solidFill>
-                          <a:latin typeface="Paperlogy 4 Regular" pitchFamily="2" charset="-127"/>
-                          <a:ea typeface="Paperlogy 4 Regular" pitchFamily="2" charset="-127"/>
-                        </a:rPr>
-                        <a:t> </a:t>
-                      </a:r>
-                      <a:r>
-                        <a:rPr sz="1300" b="0" i="0" spc="120" baseline="0" dirty="0">
-                          <a:solidFill>
-                            <a:srgbClr val="555555"/>
-                          </a:solidFill>
-                          <a:latin typeface="Paperlogy 4 Regular" pitchFamily="2" charset="-127"/>
-                          <a:ea typeface="Paperlogy 4 Regular" pitchFamily="2" charset="-127"/>
-                        </a:rPr>
-                        <a:t>12개 </a:t>
-                      </a:r>
-                      <a:r>
-                        <a:rPr sz="1300" b="0" i="0" spc="120" baseline="0" dirty="0" err="1">
-                          <a:solidFill>
-                            <a:srgbClr val="555555"/>
-                          </a:solidFill>
-                          <a:latin typeface="Paperlogy 4 Regular" pitchFamily="2" charset="-127"/>
-                          <a:ea typeface="Paperlogy 4 Regular" pitchFamily="2" charset="-127"/>
-                        </a:rPr>
-                        <a:t>도메인</a:t>
-                      </a:r>
-                      <a:r>
-                        <a:rPr sz="1300" b="0" i="0" spc="120" baseline="0" dirty="0">
-                          <a:solidFill>
-                            <a:srgbClr val="555555"/>
-                          </a:solidFill>
-                          <a:latin typeface="Paperlogy 4 Regular" pitchFamily="2" charset="-127"/>
-                          <a:ea typeface="Paperlogy 4 Regular" pitchFamily="2" charset="-127"/>
-                        </a:rPr>
-                        <a:t> </a:t>
-                      </a:r>
-                      <a:r>
-                        <a:rPr sz="1300" b="0" i="0" spc="120" baseline="0" dirty="0" err="1">
-                          <a:solidFill>
-                            <a:srgbClr val="555555"/>
-                          </a:solidFill>
-                          <a:latin typeface="Paperlogy 4 Regular" pitchFamily="2" charset="-127"/>
-                          <a:ea typeface="Paperlogy 4 Regular" pitchFamily="2" charset="-127"/>
-                        </a:rPr>
-                        <a:t>전체</a:t>
-                      </a:r>
-                      <a:r>
-                        <a:rPr sz="1300" b="0" i="0" spc="120" baseline="0" dirty="0">
-                          <a:solidFill>
-                            <a:srgbClr val="555555"/>
-                          </a:solidFill>
-                          <a:latin typeface="Paperlogy 4 Regular" pitchFamily="2" charset="-127"/>
-                          <a:ea typeface="Paperlogy 4 Regular" pitchFamily="2" charset="-127"/>
-                        </a:rPr>
-                        <a:t> </a:t>
+                        <a:rPr lang="ko-KR" altLang="en-US" sz="1200" b="0" i="0" spc="120" baseline="0" dirty="0">
+                          <a:solidFill>
+                            <a:srgbClr val="555555"/>
+                          </a:solidFill>
+                          <a:latin typeface="Paperlogy 4 Regular" pitchFamily="2" charset="-127"/>
+                          <a:ea typeface="Paperlogy 4 Regular" pitchFamily="2" charset="-127"/>
+                        </a:rPr>
+                        <a:t> 범용성 검증</a:t>
                       </a:r>
                       <a:br>
-                        <a:rPr lang="en-US" sz="1300" b="0" i="0" spc="120" baseline="0" dirty="0">
+                        <a:rPr lang="ko-KR" altLang="en-US" sz="1200" b="0" i="0" spc="120" baseline="0" dirty="0">
                           <a:solidFill>
                             <a:srgbClr val="555555"/>
                           </a:solidFill>
@@ -13664,34 +13889,53 @@
                         </a:rPr>
                       </a:br>
                       <a:r>
-                        <a:rPr sz="1300" b="0" i="0" spc="120" baseline="0" dirty="0">
-                          <a:solidFill>
-                            <a:srgbClr val="555555"/>
-                          </a:solidFill>
-                          <a:latin typeface="Paperlogy 4 Regular" pitchFamily="2" charset="-127"/>
-                          <a:ea typeface="Paperlogy 4 Regular" pitchFamily="2" charset="-127"/>
-                        </a:rPr>
-                        <a:t>· 72개 Bolt (4개 </a:t>
-                      </a:r>
-                      <a:r>
-                        <a:rPr sz="1300" b="0" i="0" spc="120" baseline="0" dirty="0" err="1">
-                          <a:solidFill>
-                            <a:srgbClr val="555555"/>
-                          </a:solidFill>
-                          <a:latin typeface="Paperlogy 4 Regular" pitchFamily="2" charset="-127"/>
-                          <a:ea typeface="Paperlogy 4 Regular" pitchFamily="2" charset="-127"/>
-                        </a:rPr>
-                        <a:t>파트</a:t>
-                      </a:r>
-                      <a:r>
-                        <a:rPr sz="1300" b="0" i="0" spc="120" baseline="0" dirty="0">
-                          <a:solidFill>
-                            <a:srgbClr val="555555"/>
-                          </a:solidFill>
-                          <a:latin typeface="Paperlogy 4 Regular" pitchFamily="2" charset="-127"/>
-                          <a:ea typeface="Paperlogy 4 Regular" pitchFamily="2" charset="-127"/>
-                        </a:rPr>
-                        <a:t>, 16명)</a:t>
+                        <a:rPr lang="en-US" altLang="ko-KR" sz="1200" b="0" i="0" spc="120" baseline="0" dirty="0">
+                          <a:solidFill>
+                            <a:srgbClr val="555555"/>
+                          </a:solidFill>
+                          <a:latin typeface="Paperlogy 4 Regular" pitchFamily="2" charset="-127"/>
+                          <a:ea typeface="Paperlogy 4 Regular" pitchFamily="2" charset="-127"/>
+                        </a:rPr>
+                        <a:t>.</a:t>
+                      </a:r>
+                      <a:r>
+                        <a:rPr lang="ko-KR" altLang="en-US" sz="1200" b="0" i="0" spc="120" baseline="0" dirty="0">
+                          <a:solidFill>
+                            <a:srgbClr val="555555"/>
+                          </a:solidFill>
+                          <a:latin typeface="Paperlogy 4 Regular" pitchFamily="2" charset="-127"/>
+                          <a:ea typeface="Paperlogy 4 Regular" pitchFamily="2" charset="-127"/>
+                        </a:rPr>
+                        <a:t> 산정 모델 확정 </a:t>
+                      </a:r>
+                      <a:br>
+                        <a:rPr lang="ko-KR" altLang="en-US" sz="1200" b="0" i="0" spc="120" baseline="0" dirty="0">
+                          <a:solidFill>
+                            <a:srgbClr val="555555"/>
+                          </a:solidFill>
+                          <a:latin typeface="Paperlogy 4 Regular" pitchFamily="2" charset="-127"/>
+                          <a:ea typeface="Paperlogy 4 Regular" pitchFamily="2" charset="-127"/>
+                        </a:rPr>
+                      </a:br>
+                      <a:r>
+                        <a:rPr lang="en-US" altLang="ko-KR" sz="1200" b="0" i="0" spc="120" baseline="0" dirty="0">
+                          <a:solidFill>
+                            <a:srgbClr val="555555"/>
+                          </a:solidFill>
+                          <a:latin typeface="Paperlogy 4 Regular" pitchFamily="2" charset="-127"/>
+                          <a:ea typeface="Paperlogy 4 Regular" pitchFamily="2" charset="-127"/>
+                        </a:rPr>
+                        <a:t>.</a:t>
+                      </a:r>
+                      <a:r>
+                        <a:rPr lang="ko-KR" altLang="en-US" sz="1200" b="0" i="0" spc="120" baseline="0" dirty="0">
+                          <a:solidFill>
+                            <a:srgbClr val="555555"/>
+                          </a:solidFill>
+                          <a:latin typeface="Paperlogy 4 Regular" pitchFamily="2" charset="-127"/>
+                          <a:ea typeface="Paperlogy 4 Regular" pitchFamily="2" charset="-127"/>
+                        </a:rPr>
+                        <a:t> 자산 전체 세트 완성</a:t>
                       </a:r>
                     </a:p>
                   </a:txBody>
@@ -13706,13 +13950,9 @@
                     <a:bodyPr/>
                     <a:lstStyle/>
                     <a:p>
-                      <a:pPr algn="l">
-                        <a:lnSpc>
-                          <a:spcPct val="150000"/>
-                        </a:lnSpc>
-                      </a:pPr>
-                      <a:r>
-                        <a:rPr lang="en-US" altLang="ko-KR" sz="1300" b="0" i="0" spc="120" baseline="0" dirty="0">
+                      <a:pPr algn="ctr"/>
+                      <a:r>
+                        <a:rPr lang="en-US" altLang="ko-KR" sz="1200" b="0" i="0" spc="120" baseline="0" dirty="0">
                           <a:solidFill>
                             <a:srgbClr val="555555"/>
                           </a:solidFill>
@@ -13722,57 +13962,67 @@
                         <a:t>.</a:t>
                       </a:r>
                       <a:r>
-                        <a:rPr lang="ko-KR" altLang="en-US" sz="1300" b="0" i="0" spc="120" baseline="0" dirty="0">
-                          <a:solidFill>
-                            <a:srgbClr val="555555"/>
-                          </a:solidFill>
-                          <a:latin typeface="Paperlogy 4 Regular" pitchFamily="2" charset="-127"/>
-                          <a:ea typeface="Paperlogy 4 Regular" pitchFamily="2" charset="-127"/>
-                        </a:rPr>
-                        <a:t> </a:t>
-                      </a:r>
-                      <a:r>
-                        <a:rPr sz="1300" b="0" i="0" spc="120" baseline="0" dirty="0" err="1">
-                          <a:solidFill>
-                            <a:srgbClr val="555555"/>
-                          </a:solidFill>
-                          <a:latin typeface="Paperlogy 4 Regular" pitchFamily="2" charset="-127"/>
-                          <a:ea typeface="Paperlogy 4 Regular" pitchFamily="2" charset="-127"/>
-                        </a:rPr>
-                        <a:t>검증된</a:t>
-                      </a:r>
-                      <a:r>
-                        <a:rPr sz="1300" b="0" i="0" spc="120" baseline="0" dirty="0">
-                          <a:solidFill>
-                            <a:srgbClr val="555555"/>
-                          </a:solidFill>
-                          <a:latin typeface="Paperlogy 4 Regular" pitchFamily="2" charset="-127"/>
-                          <a:ea typeface="Paperlogy 4 Regular" pitchFamily="2" charset="-127"/>
-                        </a:rPr>
-                        <a:t> </a:t>
-                      </a:r>
-                      <a:r>
-                        <a:rPr sz="1300" b="0" i="0" spc="120" baseline="0" dirty="0" err="1">
-                          <a:solidFill>
-                            <a:srgbClr val="555555"/>
-                          </a:solidFill>
-                          <a:latin typeface="Paperlogy 4 Regular" pitchFamily="2" charset="-127"/>
-                          <a:ea typeface="Paperlogy 4 Regular" pitchFamily="2" charset="-127"/>
-                        </a:rPr>
-                        <a:t>방법론</a:t>
-                      </a:r>
-                      <a:r>
-                        <a:rPr sz="1300" b="0" i="0" spc="120" baseline="0" dirty="0">
-                          <a:solidFill>
-                            <a:srgbClr val="555555"/>
-                          </a:solidFill>
-                          <a:latin typeface="Paperlogy 4 Regular" pitchFamily="2" charset="-127"/>
-                          <a:ea typeface="Paperlogy 4 Regular" pitchFamily="2" charset="-127"/>
-                        </a:rPr>
-                        <a:t> </a:t>
+                        <a:rPr lang="ko-KR" altLang="en-US" sz="1200" b="0" i="0" spc="120" baseline="0" dirty="0">
+                          <a:solidFill>
+                            <a:srgbClr val="555555"/>
+                          </a:solidFill>
+                          <a:latin typeface="Paperlogy 4 Regular" pitchFamily="2" charset="-127"/>
+                          <a:ea typeface="Paperlogy 4 Regular" pitchFamily="2" charset="-127"/>
+                        </a:rPr>
+                        <a:t> 비용 </a:t>
+                      </a:r>
+                      <a:r>
+                        <a:rPr lang="en-US" altLang="ko-KR" sz="1200" b="0" i="0" spc="120" baseline="0" dirty="0">
+                          <a:solidFill>
+                            <a:srgbClr val="555555"/>
+                          </a:solidFill>
+                          <a:latin typeface="Paperlogy 4 Regular" pitchFamily="2" charset="-127"/>
+                          <a:ea typeface="Paperlogy 4 Regular" pitchFamily="2" charset="-127"/>
+                        </a:rPr>
+                        <a:t>30% </a:t>
+                      </a:r>
+                      <a:r>
+                        <a:rPr lang="ko-KR" altLang="en-US" sz="1200" b="0" i="0" spc="120" baseline="0" dirty="0">
+                          <a:solidFill>
+                            <a:srgbClr val="555555"/>
+                          </a:solidFill>
+                          <a:latin typeface="Paperlogy 4 Regular" pitchFamily="2" charset="-127"/>
+                          <a:ea typeface="Paperlogy 4 Regular" pitchFamily="2" charset="-127"/>
+                        </a:rPr>
+                        <a:t>절감</a:t>
+                      </a:r>
+                      <a:r>
+                        <a:rPr lang="en-US" altLang="ko-KR" sz="1200" b="0" i="0" spc="120" baseline="0" dirty="0">
+                          <a:solidFill>
+                            <a:srgbClr val="555555"/>
+                          </a:solidFill>
+                          <a:latin typeface="Paperlogy 4 Regular" pitchFamily="2" charset="-127"/>
+                          <a:ea typeface="Paperlogy 4 Regular" pitchFamily="2" charset="-127"/>
+                        </a:rPr>
+                        <a:t>(</a:t>
+                      </a:r>
+                      <a:r>
+                        <a:rPr lang="ko-KR" altLang="en-US" sz="1200" b="0" i="0" spc="120" baseline="0" dirty="0">
+                          <a:solidFill>
+                            <a:srgbClr val="555555"/>
+                          </a:solidFill>
+                          <a:latin typeface="Paperlogy 4 Regular" pitchFamily="2" charset="-127"/>
+                          <a:ea typeface="Paperlogy 4 Regular" pitchFamily="2" charset="-127"/>
+                        </a:rPr>
+                        <a:t>목표수치</a:t>
+                      </a:r>
+                      <a:r>
+                        <a:rPr lang="en-US" altLang="ko-KR" sz="1200" b="0" i="0" spc="120" baseline="0" dirty="0">
+                          <a:solidFill>
+                            <a:srgbClr val="555555"/>
+                          </a:solidFill>
+                          <a:latin typeface="Paperlogy 4 Regular" pitchFamily="2" charset="-127"/>
+                          <a:ea typeface="Paperlogy 4 Regular" pitchFamily="2" charset="-127"/>
+                        </a:rPr>
+                        <a:t>)</a:t>
                       </a:r>
                       <a:br>
-                        <a:rPr lang="en-US" sz="1300" b="0" i="0" spc="120" baseline="0" dirty="0">
+                        <a:rPr lang="ko-KR" altLang="en-US" sz="1200" b="0" i="0" spc="120" baseline="0" dirty="0">
                           <a:solidFill>
                             <a:srgbClr val="555555"/>
                           </a:solidFill>
@@ -13781,56 +14031,36 @@
                         </a:rPr>
                       </a:br>
                       <a:r>
-                        <a:rPr lang="en-US" altLang="ko-KR" sz="1300" b="0" i="0" spc="120" baseline="0" dirty="0">
-                          <a:solidFill>
-                            <a:srgbClr val="555555"/>
-                          </a:solidFill>
-                          <a:latin typeface="Paperlogy 4 Regular" pitchFamily="2" charset="-127"/>
-                          <a:ea typeface="Paperlogy 4 Regular" pitchFamily="2" charset="-127"/>
-                        </a:rPr>
-                        <a:t>.</a:t>
-                      </a:r>
-                      <a:r>
-                        <a:rPr lang="ko-KR" altLang="en-US" sz="1300" b="0" i="0" spc="120" baseline="0" dirty="0">
-                          <a:solidFill>
-                            <a:srgbClr val="555555"/>
-                          </a:solidFill>
-                          <a:latin typeface="Paperlogy 4 Regular" pitchFamily="2" charset="-127"/>
-                          <a:ea typeface="Paperlogy 4 Regular" pitchFamily="2" charset="-127"/>
-                        </a:rPr>
-                        <a:t> </a:t>
-                      </a:r>
-                      <a:r>
-                        <a:rPr sz="1300" b="0" i="0" spc="120" baseline="0" dirty="0" err="1">
-                          <a:solidFill>
-                            <a:srgbClr val="555555"/>
-                          </a:solidFill>
-                          <a:latin typeface="Paperlogy 4 Regular" pitchFamily="2" charset="-127"/>
-                          <a:ea typeface="Paperlogy 4 Regular" pitchFamily="2" charset="-127"/>
-                        </a:rPr>
-                        <a:t>자산</a:t>
-                      </a:r>
-                      <a:r>
-                        <a:rPr sz="1300" b="0" i="0" spc="120" baseline="0" dirty="0">
-                          <a:solidFill>
-                            <a:srgbClr val="555555"/>
-                          </a:solidFill>
-                          <a:latin typeface="Paperlogy 4 Regular" pitchFamily="2" charset="-127"/>
-                          <a:ea typeface="Paperlogy 4 Regular" pitchFamily="2" charset="-127"/>
-                        </a:rPr>
-                        <a:t> </a:t>
-                      </a:r>
-                      <a:r>
-                        <a:rPr sz="1300" b="0" i="0" spc="120" baseline="0" dirty="0" err="1">
-                          <a:solidFill>
-                            <a:srgbClr val="555555"/>
-                          </a:solidFill>
-                          <a:latin typeface="Paperlogy 4 Regular" pitchFamily="2" charset="-127"/>
-                          <a:ea typeface="Paperlogy 4 Regular" pitchFamily="2" charset="-127"/>
-                        </a:rPr>
-                        <a:t>세트</a:t>
-                      </a:r>
-                      <a:endParaRPr sz="1300" b="0" i="0" spc="120" baseline="0" dirty="0">
+                        <a:rPr lang="en-US" altLang="ko-KR" sz="1200" b="0" i="0" spc="120" baseline="0" dirty="0">
+                          <a:solidFill>
+                            <a:srgbClr val="555555"/>
+                          </a:solidFill>
+                          <a:latin typeface="Paperlogy 4 Regular" pitchFamily="2" charset="-127"/>
+                          <a:ea typeface="Paperlogy 4 Regular" pitchFamily="2" charset="-127"/>
+                        </a:rPr>
+                        <a:t>(SI</a:t>
+                      </a:r>
+                      <a:r>
+                        <a:rPr lang="ko-KR" altLang="en-US" sz="1200" b="0" i="0" spc="120" baseline="0" dirty="0">
+                          <a:solidFill>
+                            <a:srgbClr val="555555"/>
+                          </a:solidFill>
+                          <a:latin typeface="Paperlogy 4 Regular" pitchFamily="2" charset="-127"/>
+                          <a:ea typeface="Paperlogy 4 Regular" pitchFamily="2" charset="-127"/>
+                        </a:rPr>
+                        <a:t> 프로젝트 적용</a:t>
+                      </a:r>
+                      <a:r>
+                        <a:rPr lang="en-US" altLang="ko-KR" sz="1200" b="0" i="0" spc="120" baseline="0" dirty="0">
+                          <a:solidFill>
+                            <a:srgbClr val="555555"/>
+                          </a:solidFill>
+                          <a:latin typeface="Paperlogy 4 Regular" pitchFamily="2" charset="-127"/>
+                          <a:ea typeface="Paperlogy 4 Regular" pitchFamily="2" charset="-127"/>
+                        </a:rPr>
+                        <a:t>)</a:t>
+                      </a:r>
+                      <a:endParaRPr sz="1200" b="0" i="0" spc="120" baseline="0" dirty="0">
                         <a:solidFill>
                           <a:srgbClr val="555555"/>
                         </a:solidFill>
@@ -13851,28 +14081,40 @@
                   </a:ext>
                 </a:extLst>
               </a:tr>
-              <a:tr h="849086">
+              <a:tr h="457200">
                 <a:tc>
                   <a:txBody>
                     <a:bodyPr/>
                     <a:lstStyle/>
                     <a:p>
-                      <a:pPr algn="ctr">
+                      <a:pPr marL="0" marR="0" indent="0" algn="ctr" defTabSz="457200" rtl="0" eaLnBrk="1" fontAlgn="auto" latinLnBrk="0" hangingPunct="1">
                         <a:lnSpc>
-                          <a:spcPct val="150000"/>
+                          <a:spcPct val="100000"/>
                         </a:lnSpc>
+                        <a:spcBef>
+                          <a:spcPts val="0"/>
+                        </a:spcBef>
+                        <a:spcAft>
+                          <a:spcPts val="0"/>
+                        </a:spcAft>
+                        <a:buClrTx/>
+                        <a:buSzTx/>
+                        <a:buFontTx/>
+                        <a:buNone/>
+                        <a:tabLst/>
+                        <a:defRPr/>
                       </a:pPr>
                       <a:r>
-                        <a:rPr sz="1300" b="1" i="0" spc="300" baseline="0" dirty="0" err="1">
+                        <a:rPr lang="ko-KR" altLang="en-US" sz="1200" b="1" i="0" spc="120" baseline="0" dirty="0">
                           <a:solidFill>
                             <a:srgbClr val="1F3B57"/>
                           </a:solidFill>
                           <a:latin typeface="Paperlogy 4 Regular" pitchFamily="2" charset="-127"/>
                           <a:ea typeface="Paperlogy 4 Regular" pitchFamily="2" charset="-127"/>
                         </a:rPr>
-                        <a:t>진행</a:t>
-                      </a:r>
-                      <a:endParaRPr sz="1300" b="1" i="0" spc="300" baseline="0" dirty="0">
+                        <a:t>범위</a:t>
+                      </a:r>
+                      <a:endParaRPr sz="1200" b="1" i="0" spc="120" baseline="0" dirty="0">
                         <a:solidFill>
                           <a:srgbClr val="1F3B57"/>
                         </a:solidFill>
@@ -13892,23 +14134,23 @@
                     <a:bodyPr/>
                     <a:lstStyle/>
                     <a:p>
-                      <a:pPr algn="l">
+                      <a:pPr algn="ctr">
                         <a:lnSpc>
                           <a:spcPct val="150000"/>
                         </a:lnSpc>
                       </a:pPr>
                       <a:r>
-                        <a:rPr lang="en-US" altLang="ko-KR" sz="1300" b="0" i="0" spc="120" baseline="0" dirty="0">
-                          <a:solidFill>
-                            <a:srgbClr val="555555"/>
-                          </a:solidFill>
-                          <a:latin typeface="Paperlogy 4 Regular" pitchFamily="2" charset="-127"/>
-                          <a:ea typeface="Paperlogy 4 Regular" pitchFamily="2" charset="-127"/>
-                        </a:rPr>
-                        <a:t>.</a:t>
-                      </a:r>
-                      <a:r>
-                        <a:rPr lang="ko-KR" altLang="en-US" sz="1300" b="0" i="0" spc="120" baseline="0" dirty="0">
+                        <a:rPr lang="en-US" altLang="ko-KR" sz="1200" b="0" i="0" spc="120" baseline="0" dirty="0">
+                          <a:solidFill>
+                            <a:srgbClr val="555555"/>
+                          </a:solidFill>
+                          <a:latin typeface="Paperlogy 4 Regular" pitchFamily="2" charset="-127"/>
+                          <a:ea typeface="Paperlogy 4 Regular" pitchFamily="2" charset="-127"/>
+                        </a:rPr>
+                        <a:t>. Order</a:t>
+                      </a:r>
+                      <a:r>
+                        <a:rPr lang="ko-KR" altLang="en-US" sz="1200" b="0" i="0" spc="120" baseline="0" dirty="0">
                           <a:solidFill>
                             <a:srgbClr val="555555"/>
                           </a:solidFill>
@@ -13918,17 +14160,17 @@
                         <a:t> </a:t>
                       </a:r>
                       <a:r>
-                        <a:rPr sz="1300" b="0" i="0" spc="120" baseline="0" dirty="0" err="1">
-                          <a:solidFill>
-                            <a:srgbClr val="555555"/>
-                          </a:solidFill>
-                          <a:latin typeface="Paperlogy 4 Regular" pitchFamily="2" charset="-127"/>
-                          <a:ea typeface="Paperlogy 4 Regular" pitchFamily="2" charset="-127"/>
-                        </a:rPr>
-                        <a:t>착수~구조설계</a:t>
-                      </a:r>
-                      <a:r>
-                        <a:rPr sz="1300" b="0" i="0" spc="120" baseline="0" dirty="0">
+                        <a:rPr lang="en-US" altLang="ko-KR" sz="1200" b="0" i="0" spc="120" baseline="0" dirty="0">
+                          <a:solidFill>
+                            <a:srgbClr val="555555"/>
+                          </a:solidFill>
+                          <a:latin typeface="Paperlogy 4 Regular" pitchFamily="2" charset="-127"/>
+                          <a:ea typeface="Paperlogy 4 Regular" pitchFamily="2" charset="-127"/>
+                        </a:rPr>
+                        <a:t>+</a:t>
+                      </a:r>
+                      <a:r>
+                        <a:rPr lang="ko-KR" altLang="en-US" sz="1200" b="0" i="0" spc="120" baseline="0" dirty="0">
                           <a:solidFill>
                             <a:srgbClr val="555555"/>
                           </a:solidFill>
@@ -13938,27 +14180,17 @@
                         <a:t> </a:t>
                       </a:r>
                       <a:r>
-                        <a:rPr lang="en-US" altLang="ko-KR" sz="1300" b="0" i="0" spc="120" baseline="0" dirty="0">
-                          <a:solidFill>
-                            <a:srgbClr val="555555"/>
-                          </a:solidFill>
-                          <a:latin typeface="Paperlogy 4 Regular" pitchFamily="2" charset="-127"/>
-                          <a:ea typeface="Paperlogy 4 Regular" pitchFamily="2" charset="-127"/>
-                        </a:rPr>
-                        <a:t>5</a:t>
-                      </a:r>
-                      <a:r>
-                        <a:rPr sz="1300" b="0" i="0" spc="120" baseline="0" dirty="0">
-                          <a:solidFill>
-                            <a:srgbClr val="555555"/>
-                          </a:solidFill>
-                          <a:latin typeface="Paperlogy 4 Regular" pitchFamily="2" charset="-127"/>
-                          <a:ea typeface="Paperlogy 4 Regular" pitchFamily="2" charset="-127"/>
-                        </a:rPr>
-                        <a:t>주 </a:t>
+                        <a:rPr lang="en-US" altLang="ko-KR" sz="1200" b="0" i="0" spc="120" baseline="0" dirty="0">
+                          <a:solidFill>
+                            <a:srgbClr val="555555"/>
+                          </a:solidFill>
+                          <a:latin typeface="Paperlogy 4 Regular" pitchFamily="2" charset="-127"/>
+                          <a:ea typeface="Paperlogy 4 Regular" pitchFamily="2" charset="-127"/>
+                        </a:rPr>
+                        <a:t>Payment </a:t>
                       </a:r>
                       <a:br>
-                        <a:rPr lang="en-US" sz="1300" b="0" i="0" spc="120" baseline="0" dirty="0">
+                        <a:rPr lang="en-US" altLang="ko-KR" sz="1200" b="0" i="0" spc="120" baseline="0" dirty="0">
                           <a:solidFill>
                             <a:srgbClr val="555555"/>
                           </a:solidFill>
@@ -13967,143 +14199,34 @@
                         </a:rPr>
                       </a:br>
                       <a:r>
-                        <a:rPr lang="en-US" altLang="ko-KR" sz="1300" b="0" i="0" spc="120" baseline="0" dirty="0">
-                          <a:solidFill>
-                            <a:srgbClr val="555555"/>
-                          </a:solidFill>
-                          <a:latin typeface="Paperlogy 4 Regular" pitchFamily="2" charset="-127"/>
-                          <a:ea typeface="Paperlogy 4 Regular" pitchFamily="2" charset="-127"/>
-                        </a:rPr>
-                        <a:t>.</a:t>
-                      </a:r>
-                      <a:r>
-                        <a:rPr lang="ko-KR" altLang="en-US" sz="1300" b="0" i="0" spc="120" baseline="0" dirty="0">
-                          <a:solidFill>
-                            <a:srgbClr val="555555"/>
-                          </a:solidFill>
-                          <a:latin typeface="Paperlogy 4 Regular" pitchFamily="2" charset="-127"/>
-                          <a:ea typeface="Paperlogy 4 Regular" pitchFamily="2" charset="-127"/>
-                        </a:rPr>
-                        <a:t> </a:t>
-                      </a:r>
-                      <a:r>
-                        <a:rPr sz="1300" b="0" i="0" spc="120" baseline="0" dirty="0">
-                          <a:solidFill>
-                            <a:srgbClr val="555555"/>
-                          </a:solidFill>
-                          <a:latin typeface="Paperlogy 4 Regular" pitchFamily="2" charset="-127"/>
-                          <a:ea typeface="Paperlogy 4 Regular" pitchFamily="2" charset="-127"/>
-                        </a:rPr>
-                        <a:t>Bolt </a:t>
-                      </a:r>
-                      <a:r>
-                        <a:rPr sz="1300" b="0" i="0" spc="120" baseline="0" dirty="0" err="1">
-                          <a:solidFill>
-                            <a:srgbClr val="555555"/>
-                          </a:solidFill>
-                          <a:latin typeface="Paperlogy 4 Regular" pitchFamily="2" charset="-127"/>
-                          <a:ea typeface="Paperlogy 4 Regular" pitchFamily="2" charset="-127"/>
-                        </a:rPr>
-                        <a:t>반복</a:t>
-                      </a:r>
-                      <a:r>
-                        <a:rPr sz="1300" b="0" i="0" spc="120" baseline="0" dirty="0">
-                          <a:solidFill>
-                            <a:srgbClr val="555555"/>
-                          </a:solidFill>
-                          <a:latin typeface="Paperlogy 4 Regular" pitchFamily="2" charset="-127"/>
-                          <a:ea typeface="Paperlogy 4 Regular" pitchFamily="2" charset="-127"/>
-                        </a:rPr>
-                        <a:t> 6주 </a:t>
-                      </a:r>
-                      <a:br>
-                        <a:rPr lang="en-US" sz="1300" b="0" i="0" spc="120" baseline="0" dirty="0">
-                          <a:solidFill>
-                            <a:srgbClr val="555555"/>
-                          </a:solidFill>
-                          <a:latin typeface="Paperlogy 4 Regular" pitchFamily="2" charset="-127"/>
-                          <a:ea typeface="Paperlogy 4 Regular" pitchFamily="2" charset="-127"/>
-                        </a:rPr>
-                      </a:br>
-                      <a:r>
-                        <a:rPr lang="en-US" altLang="ko-KR" sz="1300" b="0" i="0" spc="120" baseline="0" dirty="0">
-                          <a:solidFill>
-                            <a:srgbClr val="555555"/>
-                          </a:solidFill>
-                          <a:latin typeface="Paperlogy 4 Regular" pitchFamily="2" charset="-127"/>
-                          <a:ea typeface="Paperlogy 4 Regular" pitchFamily="2" charset="-127"/>
-                        </a:rPr>
-                        <a:t>.</a:t>
-                      </a:r>
-                      <a:r>
-                        <a:rPr lang="ko-KR" altLang="en-US" sz="1300" b="0" i="0" spc="120" baseline="0" dirty="0">
-                          <a:solidFill>
-                            <a:srgbClr val="555555"/>
-                          </a:solidFill>
-                          <a:latin typeface="Paperlogy 4 Regular" pitchFamily="2" charset="-127"/>
-                          <a:ea typeface="Paperlogy 4 Regular" pitchFamily="2" charset="-127"/>
-                        </a:rPr>
-                        <a:t> </a:t>
-                      </a:r>
-                      <a:r>
-                        <a:rPr sz="1300" b="0" i="0" spc="120" baseline="0" dirty="0" err="1">
-                          <a:solidFill>
-                            <a:srgbClr val="555555"/>
-                          </a:solidFill>
-                          <a:latin typeface="Paperlogy 4 Regular" pitchFamily="2" charset="-127"/>
-                          <a:ea typeface="Paperlogy 4 Regular" pitchFamily="2" charset="-127"/>
-                        </a:rPr>
-                        <a:t>테스트</a:t>
-                      </a:r>
-                      <a:r>
-                        <a:rPr sz="1300" b="0" i="0" spc="120" baseline="0" dirty="0">
-                          <a:solidFill>
-                            <a:srgbClr val="555555"/>
-                          </a:solidFill>
-                          <a:latin typeface="Paperlogy 4 Regular" pitchFamily="2" charset="-127"/>
-                          <a:ea typeface="Paperlogy 4 Regular" pitchFamily="2" charset="-127"/>
-                        </a:rPr>
-                        <a:t>/</a:t>
-                      </a:r>
-                      <a:r>
-                        <a:rPr sz="1300" b="0" i="0" spc="120" baseline="0" dirty="0" err="1">
-                          <a:solidFill>
-                            <a:srgbClr val="555555"/>
-                          </a:solidFill>
-                          <a:latin typeface="Paperlogy 4 Regular" pitchFamily="2" charset="-127"/>
-                          <a:ea typeface="Paperlogy 4 Regular" pitchFamily="2" charset="-127"/>
-                        </a:rPr>
-                        <a:t>안정화</a:t>
-                      </a:r>
-                      <a:r>
-                        <a:rPr sz="1300" b="0" i="0" spc="120" baseline="0" dirty="0">
-                          <a:solidFill>
-                            <a:srgbClr val="555555"/>
-                          </a:solidFill>
-                          <a:latin typeface="Paperlogy 4 Regular" pitchFamily="2" charset="-127"/>
-                          <a:ea typeface="Paperlogy 4 Regular" pitchFamily="2" charset="-127"/>
-                        </a:rPr>
-                        <a:t> </a:t>
-                      </a:r>
-                      <a:r>
-                        <a:rPr lang="en-US" altLang="ko-KR" sz="1300" b="0" i="0" spc="120" baseline="0" dirty="0">
-                          <a:solidFill>
-                            <a:srgbClr val="555555"/>
-                          </a:solidFill>
-                          <a:latin typeface="Paperlogy 4 Regular" pitchFamily="2" charset="-127"/>
-                          <a:ea typeface="Paperlogy 4 Regular" pitchFamily="2" charset="-127"/>
-                        </a:rPr>
-                        <a:t>2</a:t>
-                      </a:r>
-                      <a:r>
-                        <a:rPr sz="1300" b="0" i="0" spc="120" baseline="0" dirty="0">
-                          <a:solidFill>
-                            <a:srgbClr val="555555"/>
-                          </a:solidFill>
-                          <a:latin typeface="Paperlogy 4 Regular" pitchFamily="2" charset="-127"/>
-                          <a:ea typeface="Paperlogy 4 Regular" pitchFamily="2" charset="-127"/>
-                        </a:rPr>
-                        <a:t>주 (Go/No-Go)</a:t>
+                        <a:rPr lang="en-US" altLang="ko-KR" sz="1200" b="0" i="0" spc="120" baseline="0" dirty="0">
+                          <a:solidFill>
+                            <a:srgbClr val="555555"/>
+                          </a:solidFill>
+                          <a:latin typeface="Paperlogy 4 Regular" pitchFamily="2" charset="-127"/>
+                          <a:ea typeface="Paperlogy 4 Regular" pitchFamily="2" charset="-127"/>
+                        </a:rPr>
+                        <a:t>(</a:t>
+                      </a:r>
+                      <a:r>
+                        <a:rPr lang="ko-KR" altLang="en-US" sz="1200" b="0" i="0" spc="120" baseline="0" dirty="0">
+                          <a:solidFill>
+                            <a:srgbClr val="555555"/>
+                          </a:solidFill>
+                          <a:latin typeface="Paperlogy 4 Regular" pitchFamily="2" charset="-127"/>
+                          <a:ea typeface="Paperlogy 4 Regular" pitchFamily="2" charset="-127"/>
+                        </a:rPr>
+                        <a:t>연관 도메인은 </a:t>
+                      </a:r>
+                      <a:r>
+                        <a:rPr lang="en-US" altLang="ko-KR" sz="1200" b="0" i="0" spc="120" baseline="0" dirty="0">
+                          <a:solidFill>
+                            <a:srgbClr val="555555"/>
+                          </a:solidFill>
+                          <a:latin typeface="Paperlogy 4 Regular" pitchFamily="2" charset="-127"/>
+                          <a:ea typeface="Paperlogy 4 Regular" pitchFamily="2" charset="-127"/>
+                        </a:rPr>
+                        <a:t>Mock)</a:t>
                       </a:r>
                     </a:p>
                   </a:txBody>
@@ -14118,13 +14241,13 @@
                     <a:bodyPr/>
                     <a:lstStyle/>
                     <a:p>
-                      <a:pPr algn="l">
+                      <a:pPr algn="ctr">
                         <a:lnSpc>
                           <a:spcPct val="150000"/>
                         </a:lnSpc>
                       </a:pPr>
                       <a:r>
-                        <a:rPr lang="en-US" altLang="ko-KR" sz="1300" b="0" i="0" spc="120" baseline="0" dirty="0">
+                        <a:rPr lang="en-US" altLang="ko-KR" sz="1200" b="0" i="0" spc="120" baseline="0" dirty="0">
                           <a:solidFill>
                             <a:srgbClr val="555555"/>
                           </a:solidFill>
@@ -14134,7 +14257,7 @@
                         <a:t>.</a:t>
                       </a:r>
                       <a:r>
-                        <a:rPr lang="ko-KR" altLang="en-US" sz="1300" b="0" i="0" spc="120" baseline="0" dirty="0">
+                        <a:rPr lang="ko-KR" altLang="en-US" sz="1200" b="0" i="0" spc="120" baseline="0" dirty="0">
                           <a:solidFill>
                             <a:srgbClr val="555555"/>
                           </a:solidFill>
@@ -14144,77 +14267,27 @@
                         <a:t> </a:t>
                       </a:r>
                       <a:r>
-                        <a:rPr sz="1300" b="0" i="0" spc="120" baseline="0" dirty="0">
-                          <a:solidFill>
-                            <a:srgbClr val="555555"/>
-                          </a:solidFill>
-                          <a:latin typeface="Paperlogy 4 Regular" pitchFamily="2" charset="-127"/>
-                          <a:ea typeface="Paperlogy 4 Regular" pitchFamily="2" charset="-127"/>
-                        </a:rPr>
-                        <a:t>1차 </a:t>
-                      </a:r>
-                      <a:r>
-                        <a:rPr sz="1300" b="0" i="0" spc="120" baseline="0" dirty="0" err="1">
-                          <a:solidFill>
-                            <a:srgbClr val="555555"/>
-                          </a:solidFill>
-                          <a:latin typeface="Paperlogy 4 Regular" pitchFamily="2" charset="-127"/>
-                          <a:ea typeface="Paperlogy 4 Regular" pitchFamily="2" charset="-127"/>
-                        </a:rPr>
-                        <a:t>자산을</a:t>
-                      </a:r>
-                      <a:r>
-                        <a:rPr sz="1300" b="0" i="0" spc="120" baseline="0" dirty="0">
-                          <a:solidFill>
-                            <a:srgbClr val="555555"/>
-                          </a:solidFill>
-                          <a:latin typeface="Paperlogy 4 Regular" pitchFamily="2" charset="-127"/>
-                          <a:ea typeface="Paperlogy 4 Regular" pitchFamily="2" charset="-127"/>
-                        </a:rPr>
-                        <a:t> 10개 </a:t>
-                      </a:r>
-                      <a:r>
-                        <a:rPr sz="1300" b="0" i="0" spc="120" baseline="0" dirty="0" err="1">
-                          <a:solidFill>
-                            <a:srgbClr val="555555"/>
-                          </a:solidFill>
-                          <a:latin typeface="Paperlogy 4 Regular" pitchFamily="2" charset="-127"/>
-                          <a:ea typeface="Paperlogy 4 Regular" pitchFamily="2" charset="-127"/>
-                        </a:rPr>
-                        <a:t>도메인에</a:t>
-                      </a:r>
-                      <a:r>
-                        <a:rPr sz="1300" b="0" i="0" spc="120" baseline="0" dirty="0">
-                          <a:solidFill>
-                            <a:srgbClr val="555555"/>
-                          </a:solidFill>
-                          <a:latin typeface="Paperlogy 4 Regular" pitchFamily="2" charset="-127"/>
-                          <a:ea typeface="Paperlogy 4 Regular" pitchFamily="2" charset="-127"/>
-                        </a:rPr>
-                        <a:t> </a:t>
-                      </a:r>
-                      <a:r>
-                        <a:rPr sz="1300" b="0" i="0" spc="120" baseline="0" dirty="0" err="1">
-                          <a:solidFill>
-                            <a:srgbClr val="555555"/>
-                          </a:solidFill>
-                          <a:latin typeface="Paperlogy 4 Regular" pitchFamily="2" charset="-127"/>
-                          <a:ea typeface="Paperlogy 4 Regular" pitchFamily="2" charset="-127"/>
-                        </a:rPr>
-                        <a:t>재사용</a:t>
-                      </a:r>
-                      <a:r>
-                        <a:rPr sz="1300" b="0" i="0" spc="120" baseline="0" dirty="0">
-                          <a:solidFill>
-                            <a:srgbClr val="555555"/>
-                          </a:solidFill>
-                          <a:latin typeface="Paperlogy 4 Regular" pitchFamily="2" charset="-127"/>
-                          <a:ea typeface="Paperlogy 4 Regular" pitchFamily="2" charset="-127"/>
-                        </a:rPr>
-                        <a:t>, </a:t>
+                        <a:rPr lang="en-US" altLang="ko-KR" sz="1200" b="0" i="0" spc="120" baseline="0" dirty="0">
+                          <a:solidFill>
+                            <a:srgbClr val="555555"/>
+                          </a:solidFill>
+                          <a:latin typeface="Paperlogy 4 Regular" pitchFamily="2" charset="-127"/>
+                          <a:ea typeface="Paperlogy 4 Regular" pitchFamily="2" charset="-127"/>
+                        </a:rPr>
+                        <a:t>12</a:t>
+                      </a:r>
+                      <a:r>
+                        <a:rPr lang="ko-KR" altLang="en-US" sz="1200" b="0" i="0" spc="120" baseline="0" dirty="0">
+                          <a:solidFill>
+                            <a:srgbClr val="555555"/>
+                          </a:solidFill>
+                          <a:latin typeface="Paperlogy 4 Regular" pitchFamily="2" charset="-127"/>
+                          <a:ea typeface="Paperlogy 4 Regular" pitchFamily="2" charset="-127"/>
+                        </a:rPr>
+                        <a:t>개 도메인 전체 </a:t>
                       </a:r>
                       <a:br>
-                        <a:rPr lang="en-US" sz="1300" b="0" i="0" spc="120" baseline="0" dirty="0">
+                        <a:rPr lang="ko-KR" altLang="en-US" sz="1200" b="0" i="0" spc="120" baseline="0" dirty="0">
                           <a:solidFill>
                             <a:srgbClr val="555555"/>
                           </a:solidFill>
@@ -14223,82 +14296,75 @@
                         </a:rPr>
                       </a:br>
                       <a:r>
-                        <a:rPr lang="en-US" altLang="ko-KR" sz="1300" b="0" i="0" spc="120" baseline="0" dirty="0">
-                          <a:solidFill>
-                            <a:srgbClr val="555555"/>
-                          </a:solidFill>
-                          <a:latin typeface="Paperlogy 4 Regular" pitchFamily="2" charset="-127"/>
-                          <a:ea typeface="Paperlogy 4 Regular" pitchFamily="2" charset="-127"/>
-                        </a:rPr>
-                        <a:t>.</a:t>
-                      </a:r>
-                      <a:r>
-                        <a:rPr lang="ko-KR" altLang="en-US" sz="1300" b="0" i="0" spc="120" baseline="0" dirty="0">
-                          <a:solidFill>
-                            <a:srgbClr val="555555"/>
-                          </a:solidFill>
-                          <a:latin typeface="Paperlogy 4 Regular" pitchFamily="2" charset="-127"/>
-                          <a:ea typeface="Paperlogy 4 Regular" pitchFamily="2" charset="-127"/>
-                        </a:rPr>
-                        <a:t> </a:t>
-                      </a:r>
-                      <a:r>
-                        <a:rPr sz="1300" b="0" i="0" spc="120" baseline="0" dirty="0" err="1">
-                          <a:solidFill>
-                            <a:srgbClr val="555555"/>
-                          </a:solidFill>
-                          <a:latin typeface="Paperlogy 4 Regular" pitchFamily="2" charset="-127"/>
-                          <a:ea typeface="Paperlogy 4 Regular" pitchFamily="2" charset="-127"/>
-                        </a:rPr>
-                        <a:t>생산성</a:t>
-                      </a:r>
-                      <a:r>
-                        <a:rPr sz="1300" b="0" i="0" spc="120" baseline="0" dirty="0">
-                          <a:solidFill>
-                            <a:srgbClr val="555555"/>
-                          </a:solidFill>
-                          <a:latin typeface="Paperlogy 4 Regular" pitchFamily="2" charset="-127"/>
-                          <a:ea typeface="Paperlogy 4 Regular" pitchFamily="2" charset="-127"/>
-                        </a:rPr>
-                        <a:t> </a:t>
-                      </a:r>
-                      <a:r>
-                        <a:rPr sz="1300" b="0" i="0" spc="120" baseline="0" dirty="0" err="1">
-                          <a:solidFill>
-                            <a:srgbClr val="555555"/>
-                          </a:solidFill>
-                          <a:latin typeface="Paperlogy 4 Regular" pitchFamily="2" charset="-127"/>
-                          <a:ea typeface="Paperlogy 4 Regular" pitchFamily="2" charset="-127"/>
-                        </a:rPr>
-                        <a:t>향상</a:t>
-                      </a:r>
-                      <a:r>
-                        <a:rPr sz="1300" b="0" i="0" spc="120" baseline="0" dirty="0">
-                          <a:solidFill>
-                            <a:srgbClr val="555555"/>
-                          </a:solidFill>
-                          <a:latin typeface="Paperlogy 4 Regular" pitchFamily="2" charset="-127"/>
-                          <a:ea typeface="Paperlogy 4 Regular" pitchFamily="2" charset="-127"/>
-                        </a:rPr>
-                        <a:t> </a:t>
-                      </a:r>
-                      <a:r>
-                        <a:rPr sz="1300" b="0" i="0" spc="120" baseline="0" dirty="0" err="1">
-                          <a:solidFill>
-                            <a:srgbClr val="555555"/>
-                          </a:solidFill>
-                          <a:latin typeface="Paperlogy 4 Regular" pitchFamily="2" charset="-127"/>
-                          <a:ea typeface="Paperlogy 4 Regular" pitchFamily="2" charset="-127"/>
-                        </a:rPr>
-                        <a:t>실측</a:t>
-                      </a:r>
-                      <a:endParaRPr sz="1300" b="0" i="0" spc="120" baseline="0" dirty="0">
-                        <a:solidFill>
-                          <a:srgbClr val="555555"/>
-                        </a:solidFill>
-                        <a:latin typeface="Paperlogy 4 Regular" pitchFamily="2" charset="-127"/>
-                        <a:ea typeface="Paperlogy 4 Regular" pitchFamily="2" charset="-127"/>
-                      </a:endParaRPr>
+                        <a:rPr lang="en-US" altLang="ko-KR" sz="1200" b="0" i="0" spc="120" baseline="0" dirty="0">
+                          <a:solidFill>
+                            <a:srgbClr val="555555"/>
+                          </a:solidFill>
+                          <a:latin typeface="Paperlogy 4 Regular" pitchFamily="2" charset="-127"/>
+                          <a:ea typeface="Paperlogy 4 Regular" pitchFamily="2" charset="-127"/>
+                        </a:rPr>
+                        <a:t>· 72</a:t>
+                      </a:r>
+                      <a:r>
+                        <a:rPr lang="ko-KR" altLang="en-US" sz="1200" b="0" i="0" spc="120" baseline="0" dirty="0">
+                          <a:solidFill>
+                            <a:srgbClr val="555555"/>
+                          </a:solidFill>
+                          <a:latin typeface="Paperlogy 4 Regular" pitchFamily="2" charset="-127"/>
+                          <a:ea typeface="Paperlogy 4 Regular" pitchFamily="2" charset="-127"/>
+                        </a:rPr>
+                        <a:t>개 </a:t>
+                      </a:r>
+                      <a:r>
+                        <a:rPr lang="en-US" altLang="ko-KR" sz="1200" b="0" i="0" spc="120" baseline="0" dirty="0">
+                          <a:solidFill>
+                            <a:srgbClr val="555555"/>
+                          </a:solidFill>
+                          <a:latin typeface="Paperlogy 4 Regular" pitchFamily="2" charset="-127"/>
+                          <a:ea typeface="Paperlogy 4 Regular" pitchFamily="2" charset="-127"/>
+                        </a:rPr>
+                        <a:t>Bolt (4</a:t>
+                      </a:r>
+                      <a:r>
+                        <a:rPr lang="ko-KR" altLang="en-US" sz="1200" b="0" i="0" spc="120" baseline="0" dirty="0">
+                          <a:solidFill>
+                            <a:srgbClr val="555555"/>
+                          </a:solidFill>
+                          <a:latin typeface="Paperlogy 4 Regular" pitchFamily="2" charset="-127"/>
+                          <a:ea typeface="Paperlogy 4 Regular" pitchFamily="2" charset="-127"/>
+                        </a:rPr>
+                        <a:t>개 파트</a:t>
+                      </a:r>
+                      <a:r>
+                        <a:rPr lang="en-US" altLang="ko-KR" sz="1200" b="0" i="0" spc="120" baseline="0" dirty="0">
+                          <a:solidFill>
+                            <a:srgbClr val="555555"/>
+                          </a:solidFill>
+                          <a:latin typeface="Paperlogy 4 Regular" pitchFamily="2" charset="-127"/>
+                          <a:ea typeface="Paperlogy 4 Regular" pitchFamily="2" charset="-127"/>
+                        </a:rPr>
+                        <a:t>, 16</a:t>
+                      </a:r>
+                      <a:r>
+                        <a:rPr lang="ko-KR" altLang="en-US" sz="1200" b="0" i="0" spc="120" baseline="0" dirty="0">
+                          <a:solidFill>
+                            <a:srgbClr val="555555"/>
+                          </a:solidFill>
+                          <a:latin typeface="Paperlogy 4 Regular" pitchFamily="2" charset="-127"/>
+                          <a:ea typeface="Paperlogy 4 Regular" pitchFamily="2" charset="-127"/>
+                        </a:rPr>
+                        <a:t>명</a:t>
+                      </a:r>
+                      <a:r>
+                        <a:rPr lang="en-US" altLang="ko-KR" sz="1200" b="0" i="0" spc="120" baseline="0" dirty="0">
+                          <a:solidFill>
+                            <a:srgbClr val="555555"/>
+                          </a:solidFill>
+                          <a:latin typeface="Paperlogy 4 Regular" pitchFamily="2" charset="-127"/>
+                          <a:ea typeface="Paperlogy 4 Regular" pitchFamily="2" charset="-127"/>
+                        </a:rPr>
+                        <a:t>)</a:t>
+                      </a:r>
                     </a:p>
                   </a:txBody>
                   <a:tcPr marT="18288" marB="18288" anchor="ctr">
@@ -14312,13 +14378,13 @@
                     <a:bodyPr/>
                     <a:lstStyle/>
                     <a:p>
-                      <a:pPr algn="l">
+                      <a:pPr algn="ctr">
                         <a:lnSpc>
                           <a:spcPct val="150000"/>
                         </a:lnSpc>
                       </a:pPr>
                       <a:r>
-                        <a:rPr lang="en-US" altLang="ko-KR" sz="1300" b="0" i="0" spc="120" baseline="0" dirty="0">
+                        <a:rPr lang="en-US" altLang="ko-KR" sz="1200" b="0" i="0" spc="120" baseline="0" dirty="0">
                           <a:solidFill>
                             <a:srgbClr val="555555"/>
                           </a:solidFill>
@@ -14328,7 +14394,36 @@
                         <a:t>.</a:t>
                       </a:r>
                       <a:r>
-                        <a:rPr lang="ko-KR" altLang="en-US" sz="1300" b="0" i="0" spc="120" baseline="0" dirty="0">
+                        <a:rPr lang="ko-KR" altLang="en-US" sz="1200" b="0" i="0" spc="120" baseline="0" dirty="0">
+                          <a:solidFill>
+                            <a:srgbClr val="555555"/>
+                          </a:solidFill>
+                          <a:latin typeface="Paperlogy 4 Regular" pitchFamily="2" charset="-127"/>
+                          <a:ea typeface="Paperlogy 4 Regular" pitchFamily="2" charset="-127"/>
+                        </a:rPr>
+                        <a:t> 검증된 방법론 </a:t>
+                      </a:r>
+                      <a:br>
+                        <a:rPr lang="ko-KR" altLang="en-US" sz="1200" b="0" i="0" spc="120" baseline="0" dirty="0">
+                          <a:solidFill>
+                            <a:srgbClr val="555555"/>
+                          </a:solidFill>
+                          <a:latin typeface="Paperlogy 4 Regular" pitchFamily="2" charset="-127"/>
+                          <a:ea typeface="Paperlogy 4 Regular" pitchFamily="2" charset="-127"/>
+                        </a:rPr>
+                      </a:br>
+                      <a:r>
+                        <a:rPr lang="en-US" altLang="ko-KR" sz="1200" b="0" i="0" spc="120" baseline="0" dirty="0">
+                          <a:solidFill>
+                            <a:srgbClr val="555555"/>
+                          </a:solidFill>
+                          <a:latin typeface="Paperlogy 4 Regular" pitchFamily="2" charset="-127"/>
+                          <a:ea typeface="Paperlogy 4 Regular" pitchFamily="2" charset="-127"/>
+                        </a:rPr>
+                        <a:t>.</a:t>
+                      </a:r>
+                      <a:r>
+                        <a:rPr lang="ko-KR" altLang="en-US" sz="1200" b="0" i="0" spc="120" baseline="0" dirty="0">
                           <a:solidFill>
                             <a:srgbClr val="555555"/>
                           </a:solidFill>
@@ -14338,171 +14433,25 @@
                         <a:t> </a:t>
                       </a:r>
                       <a:r>
-                        <a:rPr sz="1300" b="0" i="0" spc="120" baseline="0" dirty="0" err="1">
-                          <a:solidFill>
-                            <a:srgbClr val="555555"/>
-                          </a:solidFill>
-                          <a:latin typeface="Paperlogy 4 Regular" pitchFamily="2" charset="-127"/>
-                          <a:ea typeface="Paperlogy 4 Regular" pitchFamily="2" charset="-127"/>
-                        </a:rPr>
-                        <a:t>조직</a:t>
-                      </a:r>
-                      <a:r>
-                        <a:rPr sz="1300" b="0" i="0" spc="120" baseline="0" dirty="0">
-                          <a:solidFill>
-                            <a:srgbClr val="555555"/>
-                          </a:solidFill>
-                          <a:latin typeface="Paperlogy 4 Regular" pitchFamily="2" charset="-127"/>
-                          <a:ea typeface="Paperlogy 4 Regular" pitchFamily="2" charset="-127"/>
-                        </a:rPr>
-                        <a:t> </a:t>
-                      </a:r>
-                      <a:r>
-                        <a:rPr sz="1300" b="0" i="0" spc="120" baseline="0" dirty="0" err="1">
-                          <a:solidFill>
-                            <a:srgbClr val="555555"/>
-                          </a:solidFill>
-                          <a:latin typeface="Paperlogy 4 Regular" pitchFamily="2" charset="-127"/>
-                          <a:ea typeface="Paperlogy 4 Regular" pitchFamily="2" charset="-127"/>
-                        </a:rPr>
-                        <a:t>표준으로</a:t>
-                      </a:r>
-                      <a:r>
-                        <a:rPr sz="1300" b="0" i="0" spc="120" baseline="0" dirty="0">
-                          <a:solidFill>
-                            <a:srgbClr val="555555"/>
-                          </a:solidFill>
-                          <a:latin typeface="Paperlogy 4 Regular" pitchFamily="2" charset="-127"/>
-                          <a:ea typeface="Paperlogy 4 Regular" pitchFamily="2" charset="-127"/>
-                        </a:rPr>
-                        <a:t> </a:t>
-                      </a:r>
-                      <a:r>
-                        <a:rPr sz="1300" b="0" i="0" spc="120" baseline="0" dirty="0" err="1">
-                          <a:solidFill>
-                            <a:srgbClr val="555555"/>
-                          </a:solidFill>
-                          <a:latin typeface="Paperlogy 4 Regular" pitchFamily="2" charset="-127"/>
-                          <a:ea typeface="Paperlogy 4 Regular" pitchFamily="2" charset="-127"/>
-                        </a:rPr>
-                        <a:t>확정</a:t>
-                      </a:r>
-                      <a:r>
-                        <a:rPr sz="1300" b="0" i="0" spc="120" baseline="0" dirty="0">
-                          <a:solidFill>
-                            <a:srgbClr val="555555"/>
-                          </a:solidFill>
-                          <a:latin typeface="Paperlogy 4 Regular" pitchFamily="2" charset="-127"/>
-                          <a:ea typeface="Paperlogy 4 Regular" pitchFamily="2" charset="-127"/>
-                        </a:rPr>
-                        <a:t> </a:t>
-                      </a:r>
-                      <a:br>
-                        <a:rPr lang="en-US" sz="1300" b="0" i="0" spc="120" baseline="0" dirty="0">
-                          <a:solidFill>
-                            <a:srgbClr val="555555"/>
-                          </a:solidFill>
-                          <a:latin typeface="Paperlogy 4 Regular" pitchFamily="2" charset="-127"/>
-                          <a:ea typeface="Paperlogy 4 Regular" pitchFamily="2" charset="-127"/>
-                        </a:rPr>
-                      </a:br>
-                      <a:r>
-                        <a:rPr lang="en-US" altLang="ko-KR" sz="1300" b="0" i="0" spc="120" baseline="0" dirty="0">
-                          <a:solidFill>
-                            <a:srgbClr val="555555"/>
-                          </a:solidFill>
-                          <a:latin typeface="Paperlogy 4 Regular" pitchFamily="2" charset="-127"/>
-                          <a:ea typeface="Paperlogy 4 Regular" pitchFamily="2" charset="-127"/>
-                        </a:rPr>
-                        <a:t>.</a:t>
-                      </a:r>
-                      <a:r>
-                        <a:rPr sz="1300" b="0" i="0" spc="120" baseline="0" dirty="0">
-                          <a:solidFill>
-                            <a:srgbClr val="555555"/>
-                          </a:solidFill>
-                          <a:latin typeface="Paperlogy 4 Regular" pitchFamily="2" charset="-127"/>
-                          <a:ea typeface="Paperlogy 4 Regular" pitchFamily="2" charset="-127"/>
-                        </a:rPr>
-                        <a:t> </a:t>
-                      </a:r>
-                      <a:r>
-                        <a:rPr sz="1300" b="0" i="0" spc="120" baseline="0" dirty="0" err="1">
-                          <a:solidFill>
-                            <a:srgbClr val="555555"/>
-                          </a:solidFill>
-                          <a:latin typeface="Paperlogy 4 Regular" pitchFamily="2" charset="-127"/>
-                          <a:ea typeface="Paperlogy 4 Regular" pitchFamily="2" charset="-127"/>
-                        </a:rPr>
-                        <a:t>신규</a:t>
-                      </a:r>
-                      <a:r>
-                        <a:rPr sz="1300" b="0" i="0" spc="120" baseline="0" dirty="0">
-                          <a:solidFill>
-                            <a:srgbClr val="555555"/>
-                          </a:solidFill>
-                          <a:latin typeface="Paperlogy 4 Regular" pitchFamily="2" charset="-127"/>
-                          <a:ea typeface="Paperlogy 4 Regular" pitchFamily="2" charset="-127"/>
-                        </a:rPr>
-                        <a:t> </a:t>
-                      </a:r>
-                      <a:r>
-                        <a:rPr sz="1300" b="0" i="0" spc="120" baseline="0" dirty="0" err="1">
-                          <a:solidFill>
-                            <a:srgbClr val="555555"/>
-                          </a:solidFill>
-                          <a:latin typeface="Paperlogy 4 Regular" pitchFamily="2" charset="-127"/>
-                          <a:ea typeface="Paperlogy 4 Regular" pitchFamily="2" charset="-127"/>
-                        </a:rPr>
-                        <a:t>프로젝트</a:t>
-                      </a:r>
-                      <a:r>
-                        <a:rPr sz="1300" b="0" i="0" spc="120" baseline="0" dirty="0">
-                          <a:solidFill>
-                            <a:srgbClr val="555555"/>
-                          </a:solidFill>
-                          <a:latin typeface="Paperlogy 4 Regular" pitchFamily="2" charset="-127"/>
-                          <a:ea typeface="Paperlogy 4 Regular" pitchFamily="2" charset="-127"/>
-                        </a:rPr>
-                        <a:t> </a:t>
-                      </a:r>
-                      <a:r>
-                        <a:rPr sz="1300" b="0" i="0" spc="120" baseline="0" dirty="0" err="1">
-                          <a:solidFill>
-                            <a:srgbClr val="555555"/>
-                          </a:solidFill>
-                          <a:latin typeface="Paperlogy 4 Regular" pitchFamily="2" charset="-127"/>
-                          <a:ea typeface="Paperlogy 4 Regular" pitchFamily="2" charset="-127"/>
-                        </a:rPr>
-                        <a:t>기본</a:t>
-                      </a:r>
-                      <a:r>
-                        <a:rPr sz="1300" b="0" i="0" spc="120" baseline="0" dirty="0">
-                          <a:solidFill>
-                            <a:srgbClr val="555555"/>
-                          </a:solidFill>
-                          <a:latin typeface="Paperlogy 4 Regular" pitchFamily="2" charset="-127"/>
-                          <a:ea typeface="Paperlogy 4 Regular" pitchFamily="2" charset="-127"/>
-                        </a:rPr>
-                        <a:t> </a:t>
-                      </a:r>
-                      <a:r>
-                        <a:rPr sz="1300" b="0" i="0" spc="120" baseline="0" dirty="0" err="1">
-                          <a:solidFill>
-                            <a:srgbClr val="555555"/>
-                          </a:solidFill>
-                          <a:latin typeface="Paperlogy 4 Regular" pitchFamily="2" charset="-127"/>
-                          <a:ea typeface="Paperlogy 4 Regular" pitchFamily="2" charset="-127"/>
-                        </a:rPr>
-                        <a:t>적용</a:t>
-                      </a:r>
-                      <a:endParaRPr sz="1300" b="0" i="0" spc="120" baseline="0" dirty="0">
-                        <a:solidFill>
-                          <a:srgbClr val="555555"/>
-                        </a:solidFill>
-                        <a:latin typeface="Paperlogy 4 Regular" pitchFamily="2" charset="-127"/>
-                        <a:ea typeface="Paperlogy 4 Regular" pitchFamily="2" charset="-127"/>
-                      </a:endParaRPr>
+                        <a:rPr lang="en-US" altLang="ko-KR" sz="1200" b="0" i="0" spc="120" baseline="0" dirty="0">
+                          <a:solidFill>
+                            <a:srgbClr val="555555"/>
+                          </a:solidFill>
+                          <a:latin typeface="Paperlogy 4 Regular" pitchFamily="2" charset="-127"/>
+                          <a:ea typeface="Paperlogy 4 Regular" pitchFamily="2" charset="-127"/>
+                        </a:rPr>
+                        <a:t>B2C </a:t>
+                      </a:r>
+                      <a:r>
+                        <a:rPr lang="ko-KR" altLang="en-US" sz="1200" b="0" i="0" spc="120" baseline="0" dirty="0">
+                          <a:solidFill>
+                            <a:srgbClr val="555555"/>
+                          </a:solidFill>
+                          <a:latin typeface="Paperlogy 4 Regular" pitchFamily="2" charset="-127"/>
+                          <a:ea typeface="Paperlogy 4 Regular" pitchFamily="2" charset="-127"/>
+                        </a:rPr>
+                        <a:t>자산 세트</a:t>
+                      </a:r>
                     </a:p>
                   </a:txBody>
                   <a:tcPr marT="18288" marB="18288" anchor="ctr">
@@ -14517,28 +14466,40 @@
                   </a:ext>
                 </a:extLst>
               </a:tr>
-              <a:tr h="849085">
+              <a:tr h="564365">
                 <a:tc>
                   <a:txBody>
                     <a:bodyPr/>
                     <a:lstStyle/>
                     <a:p>
-                      <a:pPr algn="ctr">
+                      <a:pPr marL="0" marR="0" indent="0" algn="ctr" defTabSz="457200" rtl="0" eaLnBrk="1" fontAlgn="auto" latinLnBrk="0" hangingPunct="1">
                         <a:lnSpc>
-                          <a:spcPct val="150000"/>
+                          <a:spcPct val="100000"/>
                         </a:lnSpc>
+                        <a:spcBef>
+                          <a:spcPts val="0"/>
+                        </a:spcBef>
+                        <a:spcAft>
+                          <a:spcPts val="0"/>
+                        </a:spcAft>
+                        <a:buClrTx/>
+                        <a:buSzTx/>
+                        <a:buFontTx/>
+                        <a:buNone/>
+                        <a:tabLst/>
+                        <a:defRPr/>
                       </a:pPr>
                       <a:r>
-                        <a:rPr sz="1300" b="1" i="0" spc="300" baseline="0" dirty="0" err="1">
+                        <a:rPr lang="ko-KR" altLang="en-US" sz="1200" b="1" i="0" spc="120" baseline="0" dirty="0">
                           <a:solidFill>
                             <a:srgbClr val="1F3B57"/>
                           </a:solidFill>
                           <a:latin typeface="Paperlogy 4 Regular" pitchFamily="2" charset="-127"/>
                           <a:ea typeface="Paperlogy 4 Regular" pitchFamily="2" charset="-127"/>
                         </a:rPr>
-                        <a:t>목표</a:t>
-                      </a:r>
-                      <a:endParaRPr sz="1300" b="1" i="0" spc="300" baseline="0" dirty="0">
+                        <a:t>진행</a:t>
+                      </a:r>
+                      <a:endParaRPr sz="1200" b="1" i="0" spc="120" baseline="0" dirty="0">
                         <a:solidFill>
                           <a:srgbClr val="1F3B57"/>
                         </a:solidFill>
@@ -14558,13 +14519,13 @@
                     <a:bodyPr/>
                     <a:lstStyle/>
                     <a:p>
-                      <a:pPr algn="l">
+                      <a:pPr algn="ctr">
                         <a:lnSpc>
                           <a:spcPct val="150000"/>
                         </a:lnSpc>
                       </a:pPr>
                       <a:r>
-                        <a:rPr lang="en-US" altLang="ko-KR" sz="1300" b="0" i="0" spc="120" baseline="0" dirty="0">
+                        <a:rPr lang="en-US" altLang="ko-KR" sz="1200" b="0" i="0" spc="120" baseline="0" dirty="0">
                           <a:solidFill>
                             <a:srgbClr val="555555"/>
                           </a:solidFill>
@@ -14574,7 +14535,76 @@
                         <a:t>.</a:t>
                       </a:r>
                       <a:r>
-                        <a:rPr lang="ko-KR" altLang="en-US" sz="1300" b="0" i="0" spc="120" baseline="0" dirty="0">
+                        <a:rPr lang="ko-KR" altLang="en-US" sz="1200" b="0" i="0" spc="120" baseline="0" dirty="0">
+                          <a:solidFill>
+                            <a:srgbClr val="555555"/>
+                          </a:solidFill>
+                          <a:latin typeface="Paperlogy 4 Regular" pitchFamily="2" charset="-127"/>
+                          <a:ea typeface="Paperlogy 4 Regular" pitchFamily="2" charset="-127"/>
+                        </a:rPr>
+                        <a:t> 착수</a:t>
+                      </a:r>
+                      <a:r>
+                        <a:rPr lang="en-US" altLang="ko-KR" sz="1200" b="0" i="0" spc="120" baseline="0" dirty="0">
+                          <a:solidFill>
+                            <a:srgbClr val="555555"/>
+                          </a:solidFill>
+                          <a:latin typeface="Paperlogy 4 Regular" pitchFamily="2" charset="-127"/>
+                          <a:ea typeface="Paperlogy 4 Regular" pitchFamily="2" charset="-127"/>
+                        </a:rPr>
+                        <a:t>~</a:t>
+                      </a:r>
+                      <a:r>
+                        <a:rPr lang="ko-KR" altLang="en-US" sz="1200" b="0" i="0" spc="120" baseline="0" dirty="0">
+                          <a:solidFill>
+                            <a:srgbClr val="555555"/>
+                          </a:solidFill>
+                          <a:latin typeface="Paperlogy 4 Regular" pitchFamily="2" charset="-127"/>
+                          <a:ea typeface="Paperlogy 4 Regular" pitchFamily="2" charset="-127"/>
+                        </a:rPr>
+                        <a:t>구조설계 </a:t>
+                      </a:r>
+                      <a:r>
+                        <a:rPr lang="en-US" altLang="ko-KR" sz="1200" b="0" i="0" spc="120" baseline="0" dirty="0">
+                          <a:solidFill>
+                            <a:srgbClr val="555555"/>
+                          </a:solidFill>
+                          <a:latin typeface="Paperlogy 4 Regular" pitchFamily="2" charset="-127"/>
+                          <a:ea typeface="Paperlogy 4 Regular" pitchFamily="2" charset="-127"/>
+                        </a:rPr>
+                        <a:t>6</a:t>
+                      </a:r>
+                      <a:r>
+                        <a:rPr lang="ko-KR" altLang="en-US" sz="1200" b="0" i="0" spc="120" baseline="0" dirty="0">
+                          <a:solidFill>
+                            <a:srgbClr val="555555"/>
+                          </a:solidFill>
+                          <a:latin typeface="Paperlogy 4 Regular" pitchFamily="2" charset="-127"/>
+                          <a:ea typeface="Paperlogy 4 Regular" pitchFamily="2" charset="-127"/>
+                        </a:rPr>
+                        <a:t>주 </a:t>
+                      </a:r>
+                      <a:br>
+                        <a:rPr lang="ko-KR" altLang="en-US" sz="1200" b="0" i="0" spc="120" baseline="0" dirty="0">
+                          <a:solidFill>
+                            <a:srgbClr val="555555"/>
+                          </a:solidFill>
+                          <a:latin typeface="Paperlogy 4 Regular" pitchFamily="2" charset="-127"/>
+                          <a:ea typeface="Paperlogy 4 Regular" pitchFamily="2" charset="-127"/>
+                        </a:rPr>
+                      </a:br>
+                      <a:r>
+                        <a:rPr lang="en-US" altLang="ko-KR" sz="1200" b="0" i="0" spc="120" baseline="0" dirty="0">
+                          <a:solidFill>
+                            <a:srgbClr val="555555"/>
+                          </a:solidFill>
+                          <a:latin typeface="Paperlogy 4 Regular" pitchFamily="2" charset="-127"/>
+                          <a:ea typeface="Paperlogy 4 Regular" pitchFamily="2" charset="-127"/>
+                        </a:rPr>
+                        <a:t>.</a:t>
+                      </a:r>
+                      <a:r>
+                        <a:rPr lang="ko-KR" altLang="en-US" sz="1200" b="0" i="0" spc="120" baseline="0" dirty="0">
                           <a:solidFill>
                             <a:srgbClr val="555555"/>
                           </a:solidFill>
@@ -14584,47 +14614,47 @@
                         <a:t> </a:t>
                       </a:r>
                       <a:r>
-                        <a:rPr sz="1300" b="0" i="0" spc="120" baseline="0" dirty="0" err="1">
-                          <a:solidFill>
-                            <a:srgbClr val="555555"/>
-                          </a:solidFill>
-                          <a:latin typeface="Paperlogy 4 Regular" pitchFamily="2" charset="-127"/>
-                          <a:ea typeface="Paperlogy 4 Regular" pitchFamily="2" charset="-127"/>
-                        </a:rPr>
-                        <a:t>방법론</a:t>
-                      </a:r>
-                      <a:r>
-                        <a:rPr sz="1300" b="0" i="0" spc="120" baseline="0" dirty="0">
-                          <a:solidFill>
-                            <a:srgbClr val="555555"/>
-                          </a:solidFill>
-                          <a:latin typeface="Paperlogy 4 Regular" pitchFamily="2" charset="-127"/>
-                          <a:ea typeface="Paperlogy 4 Regular" pitchFamily="2" charset="-127"/>
-                        </a:rPr>
-                        <a:t> </a:t>
-                      </a:r>
-                      <a:r>
-                        <a:rPr sz="1300" b="0" i="0" spc="120" baseline="0" dirty="0" err="1">
-                          <a:solidFill>
-                            <a:srgbClr val="555555"/>
-                          </a:solidFill>
-                          <a:latin typeface="Paperlogy 4 Regular" pitchFamily="2" charset="-127"/>
-                          <a:ea typeface="Paperlogy 4 Regular" pitchFamily="2" charset="-127"/>
-                        </a:rPr>
-                        <a:t>실증</a:t>
-                      </a:r>
-                      <a:r>
-                        <a:rPr sz="1300" b="0" i="0" spc="120" baseline="0" dirty="0">
-                          <a:solidFill>
-                            <a:srgbClr val="555555"/>
-                          </a:solidFill>
-                          <a:latin typeface="Paperlogy 4 Regular" pitchFamily="2" charset="-127"/>
-                          <a:ea typeface="Paperlogy 4 Regular" pitchFamily="2" charset="-127"/>
-                        </a:rPr>
-                        <a:t> </a:t>
+                        <a:rPr lang="en-US" altLang="ko-KR" sz="1200" b="0" i="0" spc="120" baseline="0" dirty="0">
+                          <a:solidFill>
+                            <a:srgbClr val="555555"/>
+                          </a:solidFill>
+                          <a:latin typeface="Paperlogy 4 Regular" pitchFamily="2" charset="-127"/>
+                          <a:ea typeface="Paperlogy 4 Regular" pitchFamily="2" charset="-127"/>
+                        </a:rPr>
+                        <a:t>Bolt </a:t>
+                      </a:r>
+                      <a:r>
+                        <a:rPr lang="ko-KR" altLang="en-US" sz="1200" b="0" i="0" spc="120" baseline="0" dirty="0">
+                          <a:solidFill>
+                            <a:srgbClr val="555555"/>
+                          </a:solidFill>
+                          <a:latin typeface="Paperlogy 4 Regular" pitchFamily="2" charset="-127"/>
+                          <a:ea typeface="Paperlogy 4 Regular" pitchFamily="2" charset="-127"/>
+                        </a:rPr>
+                        <a:t>반복 </a:t>
+                      </a:r>
+                      <a:r>
+                        <a:rPr lang="en-US" altLang="ko-KR" sz="1200" b="0" i="0" spc="120" baseline="0" dirty="0">
+                          <a:solidFill>
+                            <a:srgbClr val="555555"/>
+                          </a:solidFill>
+                          <a:latin typeface="Paperlogy 4 Regular" pitchFamily="2" charset="-127"/>
+                          <a:ea typeface="Paperlogy 4 Regular" pitchFamily="2" charset="-127"/>
+                        </a:rPr>
+                        <a:t>6</a:t>
+                      </a:r>
+                      <a:r>
+                        <a:rPr lang="ko-KR" altLang="en-US" sz="1200" b="0" i="0" spc="120" baseline="0" dirty="0">
+                          <a:solidFill>
+                            <a:srgbClr val="555555"/>
+                          </a:solidFill>
+                          <a:latin typeface="Paperlogy 4 Regular" pitchFamily="2" charset="-127"/>
+                          <a:ea typeface="Paperlogy 4 Regular" pitchFamily="2" charset="-127"/>
+                        </a:rPr>
+                        <a:t>주 </a:t>
                       </a:r>
                       <a:br>
-                        <a:rPr lang="en-US" sz="1300" b="0" i="0" spc="120" baseline="0" dirty="0">
+                        <a:rPr lang="ko-KR" altLang="en-US" sz="1200" b="0" i="0" spc="120" baseline="0" dirty="0">
                           <a:solidFill>
                             <a:srgbClr val="555555"/>
                           </a:solidFill>
@@ -14633,7 +14663,7 @@
                         </a:rPr>
                       </a:br>
                       <a:r>
-                        <a:rPr lang="en-US" altLang="ko-KR" sz="1300" b="0" i="0" spc="120" baseline="0" dirty="0">
+                        <a:rPr lang="en-US" altLang="ko-KR" sz="1200" b="0" i="0" spc="120" baseline="0" dirty="0">
                           <a:solidFill>
                             <a:srgbClr val="555555"/>
                           </a:solidFill>
@@ -14643,171 +14673,65 @@
                         <a:t>.</a:t>
                       </a:r>
                       <a:r>
-                        <a:rPr lang="ko-KR" altLang="en-US" sz="1300" b="0" i="0" spc="120" baseline="0" dirty="0">
-                          <a:solidFill>
-                            <a:srgbClr val="555555"/>
-                          </a:solidFill>
-                          <a:latin typeface="Paperlogy 4 Regular" pitchFamily="2" charset="-127"/>
-                          <a:ea typeface="Paperlogy 4 Regular" pitchFamily="2" charset="-127"/>
-                        </a:rPr>
-                        <a:t> </a:t>
-                      </a:r>
-                      <a:r>
-                        <a:rPr sz="1300" b="0" i="0" spc="120" baseline="0" dirty="0" err="1">
-                          <a:solidFill>
-                            <a:srgbClr val="555555"/>
-                          </a:solidFill>
-                          <a:latin typeface="Paperlogy 4 Regular" pitchFamily="2" charset="-127"/>
-                          <a:ea typeface="Paperlogy 4 Regular" pitchFamily="2" charset="-127"/>
-                        </a:rPr>
-                        <a:t>산정</a:t>
-                      </a:r>
-                      <a:r>
-                        <a:rPr sz="1300" b="0" i="0" spc="120" baseline="0" dirty="0">
-                          <a:solidFill>
-                            <a:srgbClr val="555555"/>
-                          </a:solidFill>
-                          <a:latin typeface="Paperlogy 4 Regular" pitchFamily="2" charset="-127"/>
-                          <a:ea typeface="Paperlogy 4 Regular" pitchFamily="2" charset="-127"/>
-                        </a:rPr>
-                        <a:t> </a:t>
-                      </a:r>
-                      <a:r>
-                        <a:rPr sz="1300" b="0" i="0" spc="120" baseline="0" dirty="0" err="1">
-                          <a:solidFill>
-                            <a:srgbClr val="555555"/>
-                          </a:solidFill>
-                          <a:latin typeface="Paperlogy 4 Regular" pitchFamily="2" charset="-127"/>
-                          <a:ea typeface="Paperlogy 4 Regular" pitchFamily="2" charset="-127"/>
-                        </a:rPr>
-                        <a:t>모델</a:t>
-                      </a:r>
-                      <a:r>
-                        <a:rPr sz="1300" b="0" i="0" spc="120" baseline="0" dirty="0">
-                          <a:solidFill>
-                            <a:srgbClr val="555555"/>
-                          </a:solidFill>
-                          <a:latin typeface="Paperlogy 4 Regular" pitchFamily="2" charset="-127"/>
-                          <a:ea typeface="Paperlogy 4 Regular" pitchFamily="2" charset="-127"/>
-                        </a:rPr>
-                        <a:t> </a:t>
-                      </a:r>
-                      <a:r>
-                        <a:rPr sz="1300" b="0" i="0" spc="120" baseline="0" dirty="0" err="1">
-                          <a:solidFill>
-                            <a:srgbClr val="555555"/>
-                          </a:solidFill>
-                          <a:latin typeface="Paperlogy 4 Regular" pitchFamily="2" charset="-127"/>
-                          <a:ea typeface="Paperlogy 4 Regular" pitchFamily="2" charset="-127"/>
-                        </a:rPr>
-                        <a:t>초안</a:t>
-                      </a:r>
-                      <a:r>
-                        <a:rPr sz="1300" b="0" i="0" spc="120" baseline="0" dirty="0">
-                          <a:solidFill>
-                            <a:srgbClr val="555555"/>
-                          </a:solidFill>
-                          <a:latin typeface="Paperlogy 4 Regular" pitchFamily="2" charset="-127"/>
-                          <a:ea typeface="Paperlogy 4 Regular" pitchFamily="2" charset="-127"/>
-                        </a:rPr>
-                        <a:t> </a:t>
-                      </a:r>
-                      <a:br>
-                        <a:rPr lang="en-US" sz="1300" b="0" i="0" spc="120" baseline="0" dirty="0">
-                          <a:solidFill>
-                            <a:srgbClr val="555555"/>
-                          </a:solidFill>
-                          <a:latin typeface="Paperlogy 4 Regular" pitchFamily="2" charset="-127"/>
-                          <a:ea typeface="Paperlogy 4 Regular" pitchFamily="2" charset="-127"/>
-                        </a:rPr>
-                      </a:br>
-                      <a:r>
-                        <a:rPr lang="en-US" altLang="ko-KR" sz="1300" b="0" i="0" spc="120" baseline="0" dirty="0">
-                          <a:solidFill>
-                            <a:srgbClr val="555555"/>
-                          </a:solidFill>
-                          <a:latin typeface="Paperlogy 4 Regular" pitchFamily="2" charset="-127"/>
-                          <a:ea typeface="Paperlogy 4 Regular" pitchFamily="2" charset="-127"/>
-                        </a:rPr>
-                        <a:t>.</a:t>
-                      </a:r>
-                      <a:r>
-                        <a:rPr lang="ko-KR" altLang="en-US" sz="1300" b="0" i="0" spc="120" baseline="0" dirty="0">
-                          <a:solidFill>
-                            <a:srgbClr val="555555"/>
-                          </a:solidFill>
-                          <a:latin typeface="Paperlogy 4 Regular" pitchFamily="2" charset="-127"/>
-                          <a:ea typeface="Paperlogy 4 Regular" pitchFamily="2" charset="-127"/>
-                        </a:rPr>
-                        <a:t> </a:t>
-                      </a:r>
-                      <a:r>
-                        <a:rPr sz="1300" b="0" i="0" spc="120" baseline="0" dirty="0">
-                          <a:solidFill>
-                            <a:srgbClr val="555555"/>
-                          </a:solidFill>
-                          <a:latin typeface="Paperlogy 4 Regular" pitchFamily="2" charset="-127"/>
-                          <a:ea typeface="Paperlogy 4 Regular" pitchFamily="2" charset="-127"/>
-                        </a:rPr>
-                        <a:t>2개 </a:t>
-                      </a:r>
-                      <a:r>
-                        <a:rPr sz="1300" b="0" i="0" spc="120" baseline="0" dirty="0" err="1">
-                          <a:solidFill>
-                            <a:srgbClr val="555555"/>
-                          </a:solidFill>
-                          <a:latin typeface="Paperlogy 4 Regular" pitchFamily="2" charset="-127"/>
-                          <a:ea typeface="Paperlogy 4 Regular" pitchFamily="2" charset="-127"/>
-                        </a:rPr>
-                        <a:t>도메인</a:t>
-                      </a:r>
-                      <a:r>
-                        <a:rPr sz="1300" b="0" i="0" spc="120" baseline="0" dirty="0">
-                          <a:solidFill>
-                            <a:srgbClr val="555555"/>
-                          </a:solidFill>
-                          <a:latin typeface="Paperlogy 4 Regular" pitchFamily="2" charset="-127"/>
-                          <a:ea typeface="Paperlogy 4 Regular" pitchFamily="2" charset="-127"/>
-                        </a:rPr>
-                        <a:t> </a:t>
-                      </a:r>
-                      <a:r>
-                        <a:rPr sz="1300" b="0" i="0" spc="120" baseline="0" dirty="0" err="1">
-                          <a:solidFill>
-                            <a:srgbClr val="555555"/>
-                          </a:solidFill>
-                          <a:latin typeface="Paperlogy 4 Regular" pitchFamily="2" charset="-127"/>
-                          <a:ea typeface="Paperlogy 4 Regular" pitchFamily="2" charset="-127"/>
-                        </a:rPr>
-                        <a:t>자산</a:t>
-                      </a:r>
-                      <a:r>
-                        <a:rPr sz="1300" b="0" i="0" spc="120" baseline="0" dirty="0">
-                          <a:solidFill>
-                            <a:srgbClr val="555555"/>
-                          </a:solidFill>
-                          <a:latin typeface="Paperlogy 4 Regular" pitchFamily="2" charset="-127"/>
-                          <a:ea typeface="Paperlogy 4 Regular" pitchFamily="2" charset="-127"/>
-                        </a:rPr>
-                        <a:t> </a:t>
-                      </a:r>
-                      <a:r>
-                        <a:rPr sz="1300" b="0" i="0" spc="120" baseline="0" dirty="0" err="1">
-                          <a:solidFill>
-                            <a:srgbClr val="555555"/>
-                          </a:solidFill>
-                          <a:latin typeface="Paperlogy 4 Regular" pitchFamily="2" charset="-127"/>
-                          <a:ea typeface="Paperlogy 4 Regular" pitchFamily="2" charset="-127"/>
-                        </a:rPr>
-                        <a:t>세트</a:t>
-                      </a:r>
-                      <a:endParaRPr sz="1300" b="0" i="0" spc="120" baseline="0" dirty="0">
-                        <a:solidFill>
-                          <a:srgbClr val="555555"/>
-                        </a:solidFill>
-                        <a:latin typeface="Paperlogy 4 Regular" pitchFamily="2" charset="-127"/>
-                        <a:ea typeface="Paperlogy 4 Regular" pitchFamily="2" charset="-127"/>
-                      </a:endParaRPr>
+                        <a:rPr lang="ko-KR" altLang="en-US" sz="1200" b="0" i="0" spc="120" baseline="0" dirty="0">
+                          <a:solidFill>
+                            <a:srgbClr val="555555"/>
+                          </a:solidFill>
+                          <a:latin typeface="Paperlogy 4 Regular" pitchFamily="2" charset="-127"/>
+                          <a:ea typeface="Paperlogy 4 Regular" pitchFamily="2" charset="-127"/>
+                        </a:rPr>
+                        <a:t> 테스트</a:t>
+                      </a:r>
+                      <a:r>
+                        <a:rPr lang="en-US" altLang="ko-KR" sz="1200" b="0" i="0" spc="120" baseline="0" dirty="0">
+                          <a:solidFill>
+                            <a:srgbClr val="555555"/>
+                          </a:solidFill>
+                          <a:latin typeface="Paperlogy 4 Regular" pitchFamily="2" charset="-127"/>
+                          <a:ea typeface="Paperlogy 4 Regular" pitchFamily="2" charset="-127"/>
+                        </a:rPr>
+                        <a:t>/</a:t>
+                      </a:r>
+                      <a:r>
+                        <a:rPr lang="ko-KR" altLang="en-US" sz="1200" b="0" i="0" spc="120" baseline="0" dirty="0">
+                          <a:solidFill>
+                            <a:srgbClr val="555555"/>
+                          </a:solidFill>
+                          <a:latin typeface="Paperlogy 4 Regular" pitchFamily="2" charset="-127"/>
+                          <a:ea typeface="Paperlogy 4 Regular" pitchFamily="2" charset="-127"/>
+                        </a:rPr>
+                        <a:t>안정화 </a:t>
+                      </a:r>
+                      <a:r>
+                        <a:rPr lang="en-US" altLang="ko-KR" sz="1200" b="0" i="0" spc="120" baseline="0" dirty="0">
+                          <a:solidFill>
+                            <a:srgbClr val="555555"/>
+                          </a:solidFill>
+                          <a:latin typeface="Paperlogy 4 Regular" pitchFamily="2" charset="-127"/>
+                          <a:ea typeface="Paperlogy 4 Regular" pitchFamily="2" charset="-127"/>
+                        </a:rPr>
+                        <a:t>1</a:t>
+                      </a:r>
+                      <a:r>
+                        <a:rPr lang="ko-KR" altLang="en-US" sz="1200" b="0" i="0" spc="120" baseline="0" dirty="0">
+                          <a:solidFill>
+                            <a:srgbClr val="555555"/>
+                          </a:solidFill>
+                          <a:latin typeface="Paperlogy 4 Regular" pitchFamily="2" charset="-127"/>
+                          <a:ea typeface="Paperlogy 4 Regular" pitchFamily="2" charset="-127"/>
+                        </a:rPr>
+                        <a:t>주 </a:t>
+                      </a:r>
+                      <a:r>
+                        <a:rPr lang="en-US" altLang="ko-KR" sz="1200" b="0" i="0" spc="120" baseline="0" dirty="0">
+                          <a:solidFill>
+                            <a:srgbClr val="555555"/>
+                          </a:solidFill>
+                          <a:latin typeface="Paperlogy 4 Regular" pitchFamily="2" charset="-127"/>
+                          <a:ea typeface="Paperlogy 4 Regular" pitchFamily="2" charset="-127"/>
+                        </a:rPr>
+                        <a:t>(Go/No-Go)</a:t>
+                      </a:r>
                     </a:p>
                   </a:txBody>
                   <a:tcPr marT="18288" marB="18288" anchor="ctr">
@@ -14821,13 +14745,13 @@
                     <a:bodyPr/>
                     <a:lstStyle/>
                     <a:p>
-                      <a:pPr algn="l">
+                      <a:pPr algn="ctr">
                         <a:lnSpc>
                           <a:spcPct val="150000"/>
                         </a:lnSpc>
                       </a:pPr>
                       <a:r>
-                        <a:rPr lang="en-US" altLang="ko-KR" sz="1300" b="0" i="0" spc="120" baseline="0" dirty="0">
+                        <a:rPr lang="en-US" altLang="ko-KR" sz="1200" b="0" i="0" spc="120" baseline="0" dirty="0">
                           <a:solidFill>
                             <a:srgbClr val="555555"/>
                           </a:solidFill>
@@ -14837,7 +14761,7 @@
                         <a:t>.</a:t>
                       </a:r>
                       <a:r>
-                        <a:rPr lang="ko-KR" altLang="en-US" sz="1300" b="0" i="0" spc="120" baseline="0" dirty="0">
+                        <a:rPr lang="ko-KR" altLang="en-US" sz="1200" b="0" i="0" spc="120" baseline="0" dirty="0">
                           <a:solidFill>
                             <a:srgbClr val="555555"/>
                           </a:solidFill>
@@ -14847,87 +14771,57 @@
                         <a:t> </a:t>
                       </a:r>
                       <a:r>
-                        <a:rPr sz="1300" b="0" i="0" spc="120" baseline="0" dirty="0" err="1">
-                          <a:solidFill>
-                            <a:srgbClr val="555555"/>
-                          </a:solidFill>
-                          <a:latin typeface="Paperlogy 4 Regular" pitchFamily="2" charset="-127"/>
-                          <a:ea typeface="Paperlogy 4 Regular" pitchFamily="2" charset="-127"/>
-                        </a:rPr>
-                        <a:t>자산</a:t>
-                      </a:r>
-                      <a:r>
-                        <a:rPr sz="1300" b="0" i="0" spc="120" baseline="0" dirty="0">
-                          <a:solidFill>
-                            <a:srgbClr val="555555"/>
-                          </a:solidFill>
-                          <a:latin typeface="Paperlogy 4 Regular" pitchFamily="2" charset="-127"/>
-                          <a:ea typeface="Paperlogy 4 Regular" pitchFamily="2" charset="-127"/>
-                        </a:rPr>
-                        <a:t> </a:t>
-                      </a:r>
-                      <a:r>
-                        <a:rPr sz="1300" b="0" i="0" spc="120" baseline="0" dirty="0" err="1">
-                          <a:solidFill>
-                            <a:srgbClr val="555555"/>
-                          </a:solidFill>
-                          <a:latin typeface="Paperlogy 4 Regular" pitchFamily="2" charset="-127"/>
-                          <a:ea typeface="Paperlogy 4 Regular" pitchFamily="2" charset="-127"/>
-                        </a:rPr>
-                        <a:t>전체</a:t>
-                      </a:r>
-                      <a:r>
-                        <a:rPr sz="1300" b="0" i="0" spc="120" baseline="0" dirty="0">
-                          <a:solidFill>
-                            <a:srgbClr val="555555"/>
-                          </a:solidFill>
-                          <a:latin typeface="Paperlogy 4 Regular" pitchFamily="2" charset="-127"/>
-                          <a:ea typeface="Paperlogy 4 Regular" pitchFamily="2" charset="-127"/>
-                        </a:rPr>
-                        <a:t> </a:t>
-                      </a:r>
-                      <a:r>
-                        <a:rPr sz="1300" b="0" i="0" spc="120" baseline="0" dirty="0" err="1">
-                          <a:solidFill>
-                            <a:srgbClr val="555555"/>
-                          </a:solidFill>
-                          <a:latin typeface="Paperlogy 4 Regular" pitchFamily="2" charset="-127"/>
-                          <a:ea typeface="Paperlogy 4 Regular" pitchFamily="2" charset="-127"/>
-                        </a:rPr>
-                        <a:t>세트</a:t>
-                      </a:r>
-                      <a:r>
-                        <a:rPr sz="1300" b="0" i="0" spc="120" baseline="0" dirty="0">
-                          <a:solidFill>
-                            <a:srgbClr val="555555"/>
-                          </a:solidFill>
-                          <a:latin typeface="Paperlogy 4 Regular" pitchFamily="2" charset="-127"/>
-                          <a:ea typeface="Paperlogy 4 Regular" pitchFamily="2" charset="-127"/>
-                        </a:rPr>
-                        <a:t> </a:t>
-                      </a:r>
-                      <a:r>
-                        <a:rPr sz="1300" b="0" i="0" spc="120" baseline="0" dirty="0" err="1">
-                          <a:solidFill>
-                            <a:srgbClr val="555555"/>
-                          </a:solidFill>
-                          <a:latin typeface="Paperlogy 4 Regular" pitchFamily="2" charset="-127"/>
-                          <a:ea typeface="Paperlogy 4 Regular" pitchFamily="2" charset="-127"/>
-                        </a:rPr>
-                        <a:t>완성</a:t>
-                      </a:r>
-                      <a:r>
-                        <a:rPr sz="1300" b="0" i="0" spc="120" baseline="0" dirty="0">
-                          <a:solidFill>
-                            <a:srgbClr val="555555"/>
-                          </a:solidFill>
-                          <a:latin typeface="Paperlogy 4 Regular" pitchFamily="2" charset="-127"/>
-                          <a:ea typeface="Paperlogy 4 Regular" pitchFamily="2" charset="-127"/>
-                        </a:rPr>
-                        <a:t> </a:t>
+                        <a:rPr lang="en-US" altLang="ko-KR" sz="1200" b="0" i="0" spc="120" baseline="0" dirty="0">
+                          <a:solidFill>
+                            <a:srgbClr val="555555"/>
+                          </a:solidFill>
+                          <a:latin typeface="Paperlogy 4 Regular" pitchFamily="2" charset="-127"/>
+                          <a:ea typeface="Paperlogy 4 Regular" pitchFamily="2" charset="-127"/>
+                        </a:rPr>
+                        <a:t>1</a:t>
+                      </a:r>
+                      <a:r>
+                        <a:rPr lang="ko-KR" altLang="en-US" sz="1200" b="0" i="0" spc="120" baseline="0" dirty="0">
+                          <a:solidFill>
+                            <a:srgbClr val="555555"/>
+                          </a:solidFill>
+                          <a:latin typeface="Paperlogy 4 Regular" pitchFamily="2" charset="-127"/>
+                          <a:ea typeface="Paperlogy 4 Regular" pitchFamily="2" charset="-127"/>
+                        </a:rPr>
+                        <a:t>차 자산을 </a:t>
+                      </a:r>
+                      <a:r>
+                        <a:rPr lang="en-US" altLang="ko-KR" sz="1200" b="0" i="0" spc="120" baseline="0" dirty="0">
+                          <a:solidFill>
+                            <a:srgbClr val="555555"/>
+                          </a:solidFill>
+                          <a:latin typeface="Paperlogy 4 Regular" pitchFamily="2" charset="-127"/>
+                          <a:ea typeface="Paperlogy 4 Regular" pitchFamily="2" charset="-127"/>
+                        </a:rPr>
+                        <a:t>10</a:t>
+                      </a:r>
+                      <a:r>
+                        <a:rPr lang="ko-KR" altLang="en-US" sz="1200" b="0" i="0" spc="120" baseline="0" dirty="0">
+                          <a:solidFill>
+                            <a:srgbClr val="555555"/>
+                          </a:solidFill>
+                          <a:latin typeface="Paperlogy 4 Regular" pitchFamily="2" charset="-127"/>
+                          <a:ea typeface="Paperlogy 4 Regular" pitchFamily="2" charset="-127"/>
+                        </a:rPr>
+                        <a:t>개 도메인에 재사용</a:t>
+                      </a:r>
+                      <a:r>
+                        <a:rPr lang="en-US" altLang="ko-KR" sz="1200" b="0" i="0" spc="120" baseline="0" dirty="0">
+                          <a:solidFill>
+                            <a:srgbClr val="555555"/>
+                          </a:solidFill>
+                          <a:latin typeface="Paperlogy 4 Regular" pitchFamily="2" charset="-127"/>
+                          <a:ea typeface="Paperlogy 4 Regular" pitchFamily="2" charset="-127"/>
+                        </a:rPr>
+                        <a:t>, </a:t>
                       </a:r>
                       <a:br>
-                        <a:rPr lang="en-US" sz="1300" b="0" i="0" spc="120" baseline="0" dirty="0">
+                        <a:rPr lang="ko-KR" altLang="en-US" sz="1200" b="0" i="0" spc="120" baseline="0" dirty="0">
                           <a:solidFill>
                             <a:srgbClr val="555555"/>
                           </a:solidFill>
@@ -14936,7 +14830,7 @@
                         </a:rPr>
                       </a:br>
                       <a:r>
-                        <a:rPr lang="en-US" altLang="ko-KR" sz="1300" b="0" i="0" spc="120" baseline="0" dirty="0">
+                        <a:rPr lang="en-US" altLang="ko-KR" sz="1200" b="0" i="0" spc="120" baseline="0" dirty="0">
                           <a:solidFill>
                             <a:srgbClr val="555555"/>
                           </a:solidFill>
@@ -14946,141 +14840,15 @@
                         <a:t>.</a:t>
                       </a:r>
                       <a:r>
-                        <a:rPr sz="1300" b="0" i="0" spc="120" baseline="0" dirty="0">
-                          <a:solidFill>
-                            <a:srgbClr val="555555"/>
-                          </a:solidFill>
-                          <a:latin typeface="Paperlogy 4 Regular" pitchFamily="2" charset="-127"/>
-                          <a:ea typeface="Paperlogy 4 Regular" pitchFamily="2" charset="-127"/>
-                        </a:rPr>
-                        <a:t> </a:t>
-                      </a:r>
-                      <a:r>
-                        <a:rPr sz="1300" b="0" i="0" spc="120" baseline="0" dirty="0" err="1">
-                          <a:solidFill>
-                            <a:srgbClr val="555555"/>
-                          </a:solidFill>
-                          <a:latin typeface="Paperlogy 4 Regular" pitchFamily="2" charset="-127"/>
-                          <a:ea typeface="Paperlogy 4 Regular" pitchFamily="2" charset="-127"/>
-                        </a:rPr>
-                        <a:t>산정</a:t>
-                      </a:r>
-                      <a:r>
-                        <a:rPr sz="1300" b="0" i="0" spc="120" baseline="0" dirty="0">
-                          <a:solidFill>
-                            <a:srgbClr val="555555"/>
-                          </a:solidFill>
-                          <a:latin typeface="Paperlogy 4 Regular" pitchFamily="2" charset="-127"/>
-                          <a:ea typeface="Paperlogy 4 Regular" pitchFamily="2" charset="-127"/>
-                        </a:rPr>
-                        <a:t> </a:t>
-                      </a:r>
-                      <a:r>
-                        <a:rPr sz="1300" b="0" i="0" spc="120" baseline="0" dirty="0" err="1">
-                          <a:solidFill>
-                            <a:srgbClr val="555555"/>
-                          </a:solidFill>
-                          <a:latin typeface="Paperlogy 4 Regular" pitchFamily="2" charset="-127"/>
-                          <a:ea typeface="Paperlogy 4 Regular" pitchFamily="2" charset="-127"/>
-                        </a:rPr>
-                        <a:t>모델</a:t>
-                      </a:r>
-                      <a:r>
-                        <a:rPr sz="1300" b="0" i="0" spc="120" baseline="0" dirty="0">
-                          <a:solidFill>
-                            <a:srgbClr val="555555"/>
-                          </a:solidFill>
-                          <a:latin typeface="Paperlogy 4 Regular" pitchFamily="2" charset="-127"/>
-                          <a:ea typeface="Paperlogy 4 Regular" pitchFamily="2" charset="-127"/>
-                        </a:rPr>
-                        <a:t> </a:t>
-                      </a:r>
-                      <a:r>
-                        <a:rPr sz="1300" b="0" i="0" spc="120" baseline="0" dirty="0" err="1">
-                          <a:solidFill>
-                            <a:srgbClr val="555555"/>
-                          </a:solidFill>
-                          <a:latin typeface="Paperlogy 4 Regular" pitchFamily="2" charset="-127"/>
-                          <a:ea typeface="Paperlogy 4 Regular" pitchFamily="2" charset="-127"/>
-                        </a:rPr>
-                        <a:t>확정</a:t>
-                      </a:r>
-                      <a:r>
-                        <a:rPr sz="1300" b="0" i="0" spc="120" baseline="0" dirty="0">
-                          <a:solidFill>
-                            <a:srgbClr val="555555"/>
-                          </a:solidFill>
-                          <a:latin typeface="Paperlogy 4 Regular" pitchFamily="2" charset="-127"/>
-                          <a:ea typeface="Paperlogy 4 Regular" pitchFamily="2" charset="-127"/>
-                        </a:rPr>
-                        <a:t> </a:t>
-                      </a:r>
-                      <a:br>
-                        <a:rPr lang="en-US" sz="1300" b="0" i="0" spc="120" baseline="0" dirty="0">
-                          <a:solidFill>
-                            <a:srgbClr val="555555"/>
-                          </a:solidFill>
-                          <a:latin typeface="Paperlogy 4 Regular" pitchFamily="2" charset="-127"/>
-                          <a:ea typeface="Paperlogy 4 Regular" pitchFamily="2" charset="-127"/>
-                        </a:rPr>
-                      </a:br>
-                      <a:r>
-                        <a:rPr lang="en-US" altLang="ko-KR" sz="1300" b="0" i="0" spc="120" baseline="0" dirty="0">
-                          <a:solidFill>
-                            <a:srgbClr val="555555"/>
-                          </a:solidFill>
-                          <a:latin typeface="Paperlogy 4 Regular" pitchFamily="2" charset="-127"/>
-                          <a:ea typeface="Paperlogy 4 Regular" pitchFamily="2" charset="-127"/>
-                        </a:rPr>
-                        <a:t>.</a:t>
-                      </a:r>
-                      <a:r>
-                        <a:rPr sz="1300" b="0" i="0" spc="120" baseline="0" dirty="0">
-                          <a:solidFill>
-                            <a:srgbClr val="555555"/>
-                          </a:solidFill>
-                          <a:latin typeface="Paperlogy 4 Regular" pitchFamily="2" charset="-127"/>
-                          <a:ea typeface="Paperlogy 4 Regular" pitchFamily="2" charset="-127"/>
-                        </a:rPr>
-                        <a:t> </a:t>
-                      </a:r>
-                      <a:r>
-                        <a:rPr sz="1300" b="0" i="0" spc="120" baseline="0" dirty="0" err="1">
-                          <a:solidFill>
-                            <a:srgbClr val="555555"/>
-                          </a:solidFill>
-                          <a:latin typeface="Paperlogy 4 Regular" pitchFamily="2" charset="-127"/>
-                          <a:ea typeface="Paperlogy 4 Regular" pitchFamily="2" charset="-127"/>
-                        </a:rPr>
-                        <a:t>범용성</a:t>
-                      </a:r>
-                      <a:r>
-                        <a:rPr sz="1300" b="0" i="0" spc="120" baseline="0" dirty="0">
-                          <a:solidFill>
-                            <a:srgbClr val="555555"/>
-                          </a:solidFill>
-                          <a:latin typeface="Paperlogy 4 Regular" pitchFamily="2" charset="-127"/>
-                          <a:ea typeface="Paperlogy 4 Regular" pitchFamily="2" charset="-127"/>
-                        </a:rPr>
-                        <a:t> </a:t>
-                      </a:r>
-                      <a:r>
-                        <a:rPr sz="1300" b="0" i="0" spc="120" baseline="0" dirty="0" err="1">
-                          <a:solidFill>
-                            <a:srgbClr val="555555"/>
-                          </a:solidFill>
-                          <a:latin typeface="Paperlogy 4 Regular" pitchFamily="2" charset="-127"/>
-                          <a:ea typeface="Paperlogy 4 Regular" pitchFamily="2" charset="-127"/>
-                        </a:rPr>
-                        <a:t>검증</a:t>
-                      </a:r>
-                      <a:endParaRPr sz="1300" b="0" i="0" spc="120" baseline="0" dirty="0">
-                        <a:solidFill>
-                          <a:srgbClr val="555555"/>
-                        </a:solidFill>
-                        <a:latin typeface="Paperlogy 4 Regular" pitchFamily="2" charset="-127"/>
-                        <a:ea typeface="Paperlogy 4 Regular" pitchFamily="2" charset="-127"/>
-                      </a:endParaRPr>
+                        <a:rPr lang="ko-KR" altLang="en-US" sz="1200" b="0" i="0" spc="120" baseline="0" dirty="0">
+                          <a:solidFill>
+                            <a:srgbClr val="555555"/>
+                          </a:solidFill>
+                          <a:latin typeface="Paperlogy 4 Regular" pitchFamily="2" charset="-127"/>
+                          <a:ea typeface="Paperlogy 4 Regular" pitchFamily="2" charset="-127"/>
+                        </a:rPr>
+                        <a:t> 생산성 향상 실측</a:t>
+                      </a:r>
                     </a:p>
                   </a:txBody>
                   <a:tcPr marT="18288" marB="18288" anchor="ctr">
@@ -15094,13 +14862,13 @@
                     <a:bodyPr/>
                     <a:lstStyle/>
                     <a:p>
-                      <a:pPr algn="l">
+                      <a:pPr algn="ctr">
                         <a:lnSpc>
                           <a:spcPct val="150000"/>
                         </a:lnSpc>
                       </a:pPr>
                       <a:r>
-                        <a:rPr lang="en-US" altLang="ko-KR" sz="1300" b="0" i="0" spc="120" baseline="0" dirty="0">
+                        <a:rPr lang="en-US" altLang="ko-KR" sz="1200" b="0" i="0" spc="120" baseline="0" dirty="0">
                           <a:solidFill>
                             <a:srgbClr val="555555"/>
                           </a:solidFill>
@@ -15110,47 +14878,17 @@
                         <a:t>.</a:t>
                       </a:r>
                       <a:r>
-                        <a:rPr lang="ko-KR" altLang="en-US" sz="1300" b="0" i="0" spc="120" baseline="0" dirty="0">
-                          <a:solidFill>
-                            <a:srgbClr val="555555"/>
-                          </a:solidFill>
-                          <a:latin typeface="Paperlogy 4 Regular" pitchFamily="2" charset="-127"/>
-                          <a:ea typeface="Paperlogy 4 Regular" pitchFamily="2" charset="-127"/>
-                        </a:rPr>
-                        <a:t> </a:t>
-                      </a:r>
-                      <a:r>
-                        <a:rPr sz="1300" b="0" i="0" spc="120" baseline="0" dirty="0" err="1">
-                          <a:solidFill>
-                            <a:srgbClr val="555555"/>
-                          </a:solidFill>
-                          <a:latin typeface="Paperlogy 4 Regular" pitchFamily="2" charset="-127"/>
-                          <a:ea typeface="Paperlogy 4 Regular" pitchFamily="2" charset="-127"/>
-                        </a:rPr>
-                        <a:t>비용</a:t>
-                      </a:r>
-                      <a:r>
-                        <a:rPr sz="1300" b="0" i="0" spc="120" baseline="0" dirty="0">
-                          <a:solidFill>
-                            <a:srgbClr val="555555"/>
-                          </a:solidFill>
-                          <a:latin typeface="Paperlogy 4 Regular" pitchFamily="2" charset="-127"/>
-                          <a:ea typeface="Paperlogy 4 Regular" pitchFamily="2" charset="-127"/>
-                        </a:rPr>
-                        <a:t> 30% </a:t>
-                      </a:r>
-                      <a:r>
-                        <a:rPr sz="1300" b="0" i="0" spc="120" baseline="0" dirty="0" err="1">
-                          <a:solidFill>
-                            <a:srgbClr val="555555"/>
-                          </a:solidFill>
-                          <a:latin typeface="Paperlogy 4 Regular" pitchFamily="2" charset="-127"/>
-                          <a:ea typeface="Paperlogy 4 Regular" pitchFamily="2" charset="-127"/>
-                        </a:rPr>
-                        <a:t>절감</a:t>
+                        <a:rPr lang="ko-KR" altLang="en-US" sz="1200" b="0" i="0" spc="120" baseline="0" dirty="0">
+                          <a:solidFill>
+                            <a:srgbClr val="555555"/>
+                          </a:solidFill>
+                          <a:latin typeface="Paperlogy 4 Regular" pitchFamily="2" charset="-127"/>
+                          <a:ea typeface="Paperlogy 4 Regular" pitchFamily="2" charset="-127"/>
+                        </a:rPr>
+                        <a:t> 조직 표준으로 확정 </a:t>
                       </a:r>
                       <a:br>
-                        <a:rPr lang="en-US" sz="1300" b="0" i="0" spc="120" baseline="0" dirty="0">
+                        <a:rPr lang="ko-KR" altLang="en-US" sz="1200" b="0" i="0" spc="120" baseline="0" dirty="0">
                           <a:solidFill>
                             <a:srgbClr val="555555"/>
                           </a:solidFill>
@@ -15159,74 +14897,24 @@
                         </a:rPr>
                       </a:br>
                       <a:r>
-                        <a:rPr sz="1300" b="0" i="0" spc="120" baseline="0" dirty="0">
-                          <a:solidFill>
-                            <a:srgbClr val="555555"/>
-                          </a:solidFill>
-                          <a:latin typeface="Paperlogy 4 Regular" pitchFamily="2" charset="-127"/>
-                          <a:ea typeface="Paperlogy 4 Regular" pitchFamily="2" charset="-127"/>
-                        </a:rPr>
-                        <a:t>(</a:t>
-                      </a:r>
-                      <a:r>
-                        <a:rPr sz="1300" b="0" i="0" spc="120" baseline="0" dirty="0" err="1">
-                          <a:solidFill>
-                            <a:srgbClr val="555555"/>
-                          </a:solidFill>
-                          <a:latin typeface="Paperlogy 4 Regular" pitchFamily="2" charset="-127"/>
-                          <a:ea typeface="Paperlogy 4 Regular" pitchFamily="2" charset="-127"/>
-                        </a:rPr>
-                        <a:t>전</a:t>
-                      </a:r>
-                      <a:r>
-                        <a:rPr sz="1300" b="0" i="0" spc="120" baseline="0" dirty="0">
-                          <a:solidFill>
-                            <a:srgbClr val="555555"/>
-                          </a:solidFill>
-                          <a:latin typeface="Paperlogy 4 Regular" pitchFamily="2" charset="-127"/>
-                          <a:ea typeface="Paperlogy 4 Regular" pitchFamily="2" charset="-127"/>
-                        </a:rPr>
-                        <a:t> </a:t>
-                      </a:r>
-                      <a:r>
-                        <a:rPr sz="1300" b="0" i="0" spc="120" baseline="0" dirty="0" err="1">
-                          <a:solidFill>
-                            <a:srgbClr val="555555"/>
-                          </a:solidFill>
-                          <a:latin typeface="Paperlogy 4 Regular" pitchFamily="2" charset="-127"/>
-                          <a:ea typeface="Paperlogy 4 Regular" pitchFamily="2" charset="-127"/>
-                        </a:rPr>
-                        <a:t>프로젝트</a:t>
-                      </a:r>
-                      <a:r>
-                        <a:rPr sz="1300" b="0" i="0" spc="120" baseline="0" dirty="0">
-                          <a:solidFill>
-                            <a:srgbClr val="555555"/>
-                          </a:solidFill>
-                          <a:latin typeface="Paperlogy 4 Regular" pitchFamily="2" charset="-127"/>
-                          <a:ea typeface="Paperlogy 4 Regular" pitchFamily="2" charset="-127"/>
-                        </a:rPr>
-                        <a:t> </a:t>
-                      </a:r>
-                      <a:r>
-                        <a:rPr sz="1300" b="0" i="0" spc="120" baseline="0" dirty="0" err="1">
-                          <a:solidFill>
-                            <a:srgbClr val="555555"/>
-                          </a:solidFill>
-                          <a:latin typeface="Paperlogy 4 Regular" pitchFamily="2" charset="-127"/>
-                          <a:ea typeface="Paperlogy 4 Regular" pitchFamily="2" charset="-127"/>
-                        </a:rPr>
-                        <a:t>적용</a:t>
-                      </a:r>
-                      <a:r>
-                        <a:rPr sz="1300" b="0" i="0" spc="120" baseline="0" dirty="0">
-                          <a:solidFill>
-                            <a:srgbClr val="555555"/>
-                          </a:solidFill>
-                          <a:latin typeface="Paperlogy 4 Regular" pitchFamily="2" charset="-127"/>
-                          <a:ea typeface="Paperlogy 4 Regular" pitchFamily="2" charset="-127"/>
-                        </a:rPr>
-                        <a:t>)</a:t>
+                        <a:rPr lang="en-US" altLang="ko-KR" sz="1200" b="0" i="0" spc="120" baseline="0" dirty="0">
+                          <a:solidFill>
+                            <a:srgbClr val="555555"/>
+                          </a:solidFill>
+                          <a:latin typeface="Paperlogy 4 Regular" pitchFamily="2" charset="-127"/>
+                          <a:ea typeface="Paperlogy 4 Regular" pitchFamily="2" charset="-127"/>
+                        </a:rPr>
+                        <a:t>.</a:t>
+                      </a:r>
+                      <a:r>
+                        <a:rPr lang="ko-KR" altLang="en-US" sz="1200" b="0" i="0" spc="120" baseline="0" dirty="0">
+                          <a:solidFill>
+                            <a:srgbClr val="555555"/>
+                          </a:solidFill>
+                          <a:latin typeface="Paperlogy 4 Regular" pitchFamily="2" charset="-127"/>
+                          <a:ea typeface="Paperlogy 4 Regular" pitchFamily="2" charset="-127"/>
+                        </a:rPr>
+                        <a:t> 신규 프로젝트 기본 적용</a:t>
                       </a:r>
                     </a:p>
                   </a:txBody>
@@ -15239,6 +14927,212 @@
                 <a:extLst>
                   <a:ext uri="{0D108BD9-81ED-4DB2-BD59-A6C34878D82A}">
                     <a16:rowId xmlns:a16="http://schemas.microsoft.com/office/drawing/2014/main" val="10003"/>
+                  </a:ext>
+                </a:extLst>
+              </a:tr>
+              <a:tr h="457200">
+                <a:tc>
+                  <a:txBody>
+                    <a:bodyPr/>
+                    <a:lstStyle/>
+                    <a:p>
+                      <a:pPr marL="0" marR="0" indent="0" algn="ctr" defTabSz="457200" rtl="0" eaLnBrk="1" fontAlgn="auto" latinLnBrk="0" hangingPunct="1">
+                        <a:lnSpc>
+                          <a:spcPct val="100000"/>
+                        </a:lnSpc>
+                        <a:spcBef>
+                          <a:spcPts val="0"/>
+                        </a:spcBef>
+                        <a:spcAft>
+                          <a:spcPts val="0"/>
+                        </a:spcAft>
+                        <a:buClrTx/>
+                        <a:buSzTx/>
+                        <a:buFontTx/>
+                        <a:buNone/>
+                        <a:tabLst/>
+                        <a:defRPr/>
+                      </a:pPr>
+                      <a:r>
+                        <a:rPr lang="ko-KR" altLang="en-US" sz="1200" b="1" i="0" kern="1200" spc="120" baseline="0" dirty="0">
+                          <a:solidFill>
+                            <a:srgbClr val="1F3B57"/>
+                          </a:solidFill>
+                          <a:latin typeface="Paperlogy 4 Regular" pitchFamily="2" charset="-127"/>
+                          <a:ea typeface="Paperlogy 4 Regular" pitchFamily="2" charset="-127"/>
+                          <a:cs typeface="+mn-cs"/>
+                        </a:rPr>
+                        <a:t>인력</a:t>
+                      </a:r>
+                      <a:endParaRPr sz="1200" b="1" i="0" kern="1200" spc="120" baseline="0" dirty="0">
+                        <a:solidFill>
+                          <a:srgbClr val="1F3B57"/>
+                        </a:solidFill>
+                        <a:latin typeface="Paperlogy 4 Regular" pitchFamily="2" charset="-127"/>
+                        <a:ea typeface="Paperlogy 4 Regular" pitchFamily="2" charset="-127"/>
+                        <a:cs typeface="+mn-cs"/>
+                      </a:endParaRPr>
+                    </a:p>
+                  </a:txBody>
+                  <a:tcPr marT="18288" marB="18288" anchor="ctr">
+                    <a:solidFill>
+                      <a:srgbClr val="F6F8FB"/>
+                    </a:solidFill>
+                  </a:tcPr>
+                </a:tc>
+                <a:tc>
+                  <a:txBody>
+                    <a:bodyPr/>
+                    <a:lstStyle/>
+                    <a:p>
+                      <a:pPr algn="ctr">
+                        <a:lnSpc>
+                          <a:spcPct val="150000"/>
+                        </a:lnSpc>
+                      </a:pPr>
+                      <a:r>
+                        <a:rPr lang="en-US" altLang="ko-KR" sz="1200" b="0" i="0" spc="120" baseline="0" dirty="0">
+                          <a:solidFill>
+                            <a:srgbClr val="555555"/>
+                          </a:solidFill>
+                          <a:latin typeface="Paperlogy 4 Regular" pitchFamily="2" charset="-127"/>
+                          <a:ea typeface="Paperlogy 4 Regular" pitchFamily="2" charset="-127"/>
+                        </a:rPr>
+                        <a:t>4</a:t>
+                      </a:r>
+                      <a:r>
+                        <a:rPr lang="ko-KR" altLang="en-US" sz="1200" b="0" i="0" spc="120" baseline="0" dirty="0">
+                          <a:solidFill>
+                            <a:srgbClr val="555555"/>
+                          </a:solidFill>
+                          <a:latin typeface="Paperlogy 4 Regular" pitchFamily="2" charset="-127"/>
+                          <a:ea typeface="Paperlogy 4 Regular" pitchFamily="2" charset="-127"/>
+                        </a:rPr>
+                        <a:t>명</a:t>
+                      </a:r>
+                      <a:endParaRPr lang="en-US" altLang="ko-KR" sz="1200" b="0" i="0" spc="120" baseline="0" dirty="0">
+                        <a:solidFill>
+                          <a:srgbClr val="555555"/>
+                        </a:solidFill>
+                        <a:latin typeface="Paperlogy 4 Regular" pitchFamily="2" charset="-127"/>
+                        <a:ea typeface="Paperlogy 4 Regular" pitchFamily="2" charset="-127"/>
+                      </a:endParaRPr>
+                    </a:p>
+                  </a:txBody>
+                  <a:tcPr marT="18288" marB="18288" anchor="ctr">
+                    <a:solidFill>
+                      <a:srgbClr val="F6F8FB"/>
+                    </a:solidFill>
+                  </a:tcPr>
+                </a:tc>
+                <a:tc>
+                  <a:txBody>
+                    <a:bodyPr/>
+                    <a:lstStyle/>
+                    <a:p>
+                      <a:pPr marL="0" marR="0" indent="0" algn="ctr" defTabSz="457200" rtl="0" eaLnBrk="1" fontAlgn="auto" latinLnBrk="0" hangingPunct="1">
+                        <a:lnSpc>
+                          <a:spcPct val="150000"/>
+                        </a:lnSpc>
+                        <a:spcBef>
+                          <a:spcPts val="0"/>
+                        </a:spcBef>
+                        <a:spcAft>
+                          <a:spcPts val="0"/>
+                        </a:spcAft>
+                        <a:buClrTx/>
+                        <a:buSzTx/>
+                        <a:buFontTx/>
+                        <a:buNone/>
+                        <a:tabLst/>
+                        <a:defRPr/>
+                      </a:pPr>
+                      <a:r>
+                        <a:rPr lang="en-US" altLang="ko-KR" sz="1200" b="0" i="0" spc="120" baseline="0" dirty="0">
+                          <a:solidFill>
+                            <a:srgbClr val="555555"/>
+                          </a:solidFill>
+                          <a:latin typeface="Paperlogy 4 Regular" pitchFamily="2" charset="-127"/>
+                          <a:ea typeface="Paperlogy 4 Regular" pitchFamily="2" charset="-127"/>
+                        </a:rPr>
+                        <a:t>4</a:t>
+                      </a:r>
+                      <a:r>
+                        <a:rPr lang="ko-KR" altLang="en-US" sz="1200" b="0" i="0" spc="120" baseline="0" dirty="0">
+                          <a:solidFill>
+                            <a:srgbClr val="555555"/>
+                          </a:solidFill>
+                          <a:latin typeface="Paperlogy 4 Regular" pitchFamily="2" charset="-127"/>
+                          <a:ea typeface="Paperlogy 4 Regular" pitchFamily="2" charset="-127"/>
+                        </a:rPr>
+                        <a:t>개 파트</a:t>
+                      </a:r>
+                      <a:r>
+                        <a:rPr lang="en-US" altLang="ko-KR" sz="1200" b="0" i="0" spc="120" baseline="0" dirty="0">
+                          <a:solidFill>
+                            <a:srgbClr val="555555"/>
+                          </a:solidFill>
+                          <a:latin typeface="Paperlogy 4 Regular" pitchFamily="2" charset="-127"/>
+                          <a:ea typeface="Paperlogy 4 Regular" pitchFamily="2" charset="-127"/>
+                        </a:rPr>
+                        <a:t>, 16</a:t>
+                      </a:r>
+                      <a:r>
+                        <a:rPr lang="ko-KR" altLang="en-US" sz="1200" b="0" i="0" spc="120" baseline="0" dirty="0">
+                          <a:solidFill>
+                            <a:srgbClr val="555555"/>
+                          </a:solidFill>
+                          <a:latin typeface="Paperlogy 4 Regular" pitchFamily="2" charset="-127"/>
+                          <a:ea typeface="Paperlogy 4 Regular" pitchFamily="2" charset="-127"/>
+                        </a:rPr>
+                        <a:t>명</a:t>
+                      </a:r>
+                    </a:p>
+                  </a:txBody>
+                  <a:tcPr marT="18288" marB="18288" anchor="ctr">
+                    <a:solidFill>
+                      <a:srgbClr val="F6F8FB"/>
+                    </a:solidFill>
+                  </a:tcPr>
+                </a:tc>
+                <a:tc>
+                  <a:txBody>
+                    <a:bodyPr/>
+                    <a:lstStyle/>
+                    <a:p>
+                      <a:pPr algn="ctr">
+                        <a:lnSpc>
+                          <a:spcPct val="150000"/>
+                        </a:lnSpc>
+                      </a:pPr>
+                      <a:r>
+                        <a:rPr lang="en-US" altLang="ko-KR" sz="1200" b="0" i="0" spc="120" baseline="0" dirty="0">
+                          <a:solidFill>
+                            <a:srgbClr val="555555"/>
+                          </a:solidFill>
+                          <a:latin typeface="Paperlogy 4 Regular" pitchFamily="2" charset="-127"/>
+                          <a:ea typeface="Paperlogy 4 Regular" pitchFamily="2" charset="-127"/>
+                        </a:rPr>
+                        <a:t>-</a:t>
+                      </a:r>
+                      <a:endParaRPr lang="ko-KR" altLang="en-US" sz="1200" b="0" i="0" spc="120" baseline="0" dirty="0">
+                        <a:solidFill>
+                          <a:srgbClr val="555555"/>
+                        </a:solidFill>
+                        <a:latin typeface="Paperlogy 4 Regular" pitchFamily="2" charset="-127"/>
+                        <a:ea typeface="Paperlogy 4 Regular" pitchFamily="2" charset="-127"/>
+                      </a:endParaRPr>
+                    </a:p>
+                  </a:txBody>
+                  <a:tcPr marT="18288" marB="18288" anchor="ctr">
+                    <a:solidFill>
+                      <a:srgbClr val="F6F8FB"/>
+                    </a:solidFill>
+                  </a:tcPr>
+                </a:tc>
+                <a:extLst>
+                  <a:ext uri="{0D108BD9-81ED-4DB2-BD59-A6C34878D82A}">
+                    <a16:rowId xmlns:a16="http://schemas.microsoft.com/office/drawing/2014/main" val="596832771"/>
                   </a:ext>
                 </a:extLst>
               </a:tr>
